--- a/social-media/decks/topic-06-who-gets-to-decide.pptx
+++ b/social-media/decks/topic-06-who-gets-to-decide.pptx
@@ -5791,7 +5791,7 @@
         <p:spPr>
           <a:xfrm>
             <a:off x="987552" y="1463040"/>
-            <a:ext cx="2468880" cy="274320"/>
+            <a:ext cx="2651760" cy="274320"/>
           </a:xfrm>
           <a:prstGeom prst="rect">
             <a:avLst/>
@@ -5810,7 +5810,7 @@
               <a:buNone/>
             </a:pPr>
             <a:r>
-              <a:rPr lang="en-US" sz="1250" b="1" dirty="0">
+              <a:rPr lang="en-US" sz="1200" b="1" dirty="0">
                 <a:solidFill>
                   <a:srgbClr val="14171A"/>
                 </a:solidFill>
@@ -5818,9 +5818,9 @@
                 <a:ea typeface="Calibri" pitchFamily="34" charset="-122"/>
                 <a:cs typeface="Calibri" pitchFamily="34" charset="-120"/>
               </a:rPr>
-              <a:t>Where the money comes from</a:t>
-            </a:r>
-            <a:endParaRPr lang="en-US" sz="1250" dirty="0"/>
+              <a:t>Where the Money Comes From</a:t>
+            </a:r>
+            <a:endParaRPr lang="en-US" sz="1200" dirty="0"/>
           </a:p>
         </p:txBody>
       </p:sp>
@@ -5832,8 +5832,8 @@
         </p:nvSpPr>
         <p:spPr>
           <a:xfrm>
-            <a:off x="3547872" y="1463040"/>
-            <a:ext cx="5029200" cy="274320"/>
+            <a:off x="3730752" y="1463040"/>
+            <a:ext cx="4846320" cy="274320"/>
           </a:xfrm>
           <a:prstGeom prst="rect">
             <a:avLst/>
@@ -5852,7 +5852,7 @@
               <a:buNone/>
             </a:pPr>
             <a:r>
-              <a:rPr lang="en-US" sz="1250" dirty="0">
+              <a:rPr lang="en-US" sz="1200" dirty="0">
                 <a:solidFill>
                   <a:srgbClr val="3C444C"/>
                 </a:solidFill>
@@ -5862,7 +5862,7 @@
               </a:rPr>
               <a:t>You built the chain from opening an app to a company getting paid.</a:t>
             </a:r>
-            <a:endParaRPr lang="en-US" sz="1250" dirty="0"/>
+            <a:endParaRPr lang="en-US" sz="1200" dirty="0"/>
           </a:p>
         </p:txBody>
       </p:sp>
@@ -5939,7 +5939,7 @@
         <p:spPr>
           <a:xfrm>
             <a:off x="987552" y="1956816"/>
-            <a:ext cx="2468880" cy="274320"/>
+            <a:ext cx="2651760" cy="274320"/>
           </a:xfrm>
           <a:prstGeom prst="rect">
             <a:avLst/>
@@ -5958,7 +5958,7 @@
               <a:buNone/>
             </a:pPr>
             <a:r>
-              <a:rPr lang="en-US" sz="1250" b="1" dirty="0">
+              <a:rPr lang="en-US" sz="1200" b="1" dirty="0">
                 <a:solidFill>
                   <a:srgbClr val="14171A"/>
                 </a:solidFill>
@@ -5966,9 +5966,9 @@
                 <a:ea typeface="Calibri" pitchFamily="34" charset="-122"/>
                 <a:cs typeface="Calibri" pitchFamily="34" charset="-120"/>
               </a:rPr>
-              <a:t>Somebody made a film about it</a:t>
-            </a:r>
-            <a:endParaRPr lang="en-US" sz="1250" dirty="0"/>
+              <a:t>Somebody Made a Film About This</a:t>
+            </a:r>
+            <a:endParaRPr lang="en-US" sz="1200" dirty="0"/>
           </a:p>
         </p:txBody>
       </p:sp>
@@ -5980,8 +5980,8 @@
         </p:nvSpPr>
         <p:spPr>
           <a:xfrm>
-            <a:off x="3547872" y="1956816"/>
-            <a:ext cx="5029200" cy="274320"/>
+            <a:off x="3730752" y="1956816"/>
+            <a:ext cx="4846320" cy="274320"/>
           </a:xfrm>
           <a:prstGeom prst="rect">
             <a:avLst/>
@@ -6000,7 +6000,7 @@
               <a:buNone/>
             </a:pPr>
             <a:r>
-              <a:rPr lang="en-US" sz="1250" dirty="0">
+              <a:rPr lang="en-US" sz="1200" dirty="0">
                 <a:solidFill>
                   <a:srgbClr val="3C444C"/>
                 </a:solidFill>
@@ -6010,7 +6010,7 @@
               </a:rPr>
               <a:t>You took the film apart the way you took your app apart.</a:t>
             </a:r>
-            <a:endParaRPr lang="en-US" sz="1250" dirty="0"/>
+            <a:endParaRPr lang="en-US" sz="1200" dirty="0"/>
           </a:p>
         </p:txBody>
       </p:sp>
@@ -6087,7 +6087,7 @@
         <p:spPr>
           <a:xfrm>
             <a:off x="987552" y="2450592"/>
-            <a:ext cx="2468880" cy="274320"/>
+            <a:ext cx="2651760" cy="274320"/>
           </a:xfrm>
           <a:prstGeom prst="rect">
             <a:avLst/>
@@ -6106,7 +6106,7 @@
               <a:buNone/>
             </a:pPr>
             <a:r>
-              <a:rPr lang="en-US" sz="1250" b="1" dirty="0">
+              <a:rPr lang="en-US" sz="1200" b="1" dirty="0">
                 <a:solidFill>
                   <a:srgbClr val="14171A"/>
                 </a:solidFill>
@@ -6114,9 +6114,9 @@
                 <a:ea typeface="Calibri" pitchFamily="34" charset="-122"/>
                 <a:cs typeface="Calibri" pitchFamily="34" charset="-120"/>
               </a:rPr>
-              <a:t>Inside the algorithm box</a:t>
-            </a:r>
-            <a:endParaRPr lang="en-US" sz="1250" dirty="0"/>
+              <a:t>Inside the Algorithm Box</a:t>
+            </a:r>
+            <a:endParaRPr lang="en-US" sz="1200" dirty="0"/>
           </a:p>
         </p:txBody>
       </p:sp>
@@ -6128,8 +6128,8 @@
         </p:nvSpPr>
         <p:spPr>
           <a:xfrm>
-            <a:off x="3547872" y="2450592"/>
-            <a:ext cx="5029200" cy="274320"/>
+            <a:off x="3730752" y="2450592"/>
+            <a:ext cx="4846320" cy="274320"/>
           </a:xfrm>
           <a:prstGeom prst="rect">
             <a:avLst/>
@@ -6148,7 +6148,7 @@
               <a:buNone/>
             </a:pPr>
             <a:r>
-              <a:rPr lang="en-US" sz="1250" dirty="0">
+              <a:rPr lang="en-US" sz="1200" dirty="0">
                 <a:solidFill>
                   <a:srgbClr val="3C444C"/>
                 </a:solidFill>
@@ -6158,7 +6158,7 @@
               </a:rPr>
               <a:t>You opened the box almost every chain had in the middle.</a:t>
             </a:r>
-            <a:endParaRPr lang="en-US" sz="1250" dirty="0"/>
+            <a:endParaRPr lang="en-US" sz="1200" dirty="0"/>
           </a:p>
         </p:txBody>
       </p:sp>
@@ -6235,7 +6235,7 @@
         <p:spPr>
           <a:xfrm>
             <a:off x="987552" y="2944368"/>
-            <a:ext cx="2468880" cy="274320"/>
+            <a:ext cx="2651760" cy="274320"/>
           </a:xfrm>
           <a:prstGeom prst="rect">
             <a:avLst/>
@@ -6254,7 +6254,7 @@
               <a:buNone/>
             </a:pPr>
             <a:r>
-              <a:rPr lang="en-US" sz="1250" b="1" dirty="0">
+              <a:rPr lang="en-US" sz="1200" b="1" dirty="0">
                 <a:solidFill>
                   <a:srgbClr val="14171A"/>
                 </a:solidFill>
@@ -6262,9 +6262,9 @@
                 <a:ea typeface="Calibri" pitchFamily="34" charset="-122"/>
                 <a:cs typeface="Calibri" pitchFamily="34" charset="-120"/>
               </a:rPr>
-              <a:t>Go check it yourself</a:t>
-            </a:r>
-            <a:endParaRPr lang="en-US" sz="1250" dirty="0"/>
+              <a:t>The Impact and the Digital Footprint</a:t>
+            </a:r>
+            <a:endParaRPr lang="en-US" sz="1200" dirty="0"/>
           </a:p>
         </p:txBody>
       </p:sp>
@@ -6276,8 +6276,8 @@
         </p:nvSpPr>
         <p:spPr>
           <a:xfrm>
-            <a:off x="3547872" y="2944368"/>
-            <a:ext cx="5029200" cy="274320"/>
+            <a:off x="3730752" y="2944368"/>
+            <a:ext cx="4846320" cy="274320"/>
           </a:xfrm>
           <a:prstGeom prst="rect">
             <a:avLst/>
@@ -6296,7 +6296,7 @@
               <a:buNone/>
             </a:pPr>
             <a:r>
-              <a:rPr lang="en-US" sz="1250" dirty="0">
+              <a:rPr lang="en-US" sz="1200" dirty="0">
                 <a:solidFill>
                   <a:srgbClr val="3C444C"/>
                 </a:solidFill>
@@ -6304,9 +6304,9 @@
                 <a:ea typeface="Calibri" pitchFamily="34" charset="-122"/>
                 <a:cs typeface="Calibri" pitchFamily="34" charset="-120"/>
               </a:rPr>
-              <a:t>You read the company's own document instead of guessing at it.</a:t>
-            </a:r>
-            <a:endParaRPr lang="en-US" sz="1250" dirty="0"/>
+              <a:t>You read the evidence about effects, and what a record keeps.</a:t>
+            </a:r>
+            <a:endParaRPr lang="en-US" sz="1200" dirty="0"/>
           </a:p>
         </p:txBody>
       </p:sp>
@@ -6383,7 +6383,7 @@
         <p:spPr>
           <a:xfrm>
             <a:off x="987552" y="3438144"/>
-            <a:ext cx="2468880" cy="274320"/>
+            <a:ext cx="2651760" cy="274320"/>
           </a:xfrm>
           <a:prstGeom prst="rect">
             <a:avLst/>
@@ -6402,7 +6402,7 @@
               <a:buNone/>
             </a:pPr>
             <a:r>
-              <a:rPr lang="en-US" sz="1250" b="1" dirty="0">
+              <a:rPr lang="en-US" sz="1200" b="1" dirty="0">
                 <a:solidFill>
                   <a:srgbClr val="14171A"/>
                 </a:solidFill>
@@ -6410,9 +6410,9 @@
                 <a:ea typeface="Calibri" pitchFamily="34" charset="-122"/>
                 <a:cs typeface="Calibri" pitchFamily="34" charset="-120"/>
               </a:rPr>
-              <a:t>How a lie travels</a:t>
-            </a:r>
-            <a:endParaRPr lang="en-US" sz="1250" dirty="0"/>
+              <a:t>How a Lie Travels</a:t>
+            </a:r>
+            <a:endParaRPr lang="en-US" sz="1200" dirty="0"/>
           </a:p>
         </p:txBody>
       </p:sp>
@@ -6424,8 +6424,8 @@
         </p:nvSpPr>
         <p:spPr>
           <a:xfrm>
-            <a:off x="3547872" y="3438144"/>
-            <a:ext cx="5029200" cy="274320"/>
+            <a:off x="3730752" y="3438144"/>
+            <a:ext cx="4846320" cy="274320"/>
           </a:xfrm>
           <a:prstGeom prst="rect">
             <a:avLst/>
@@ -6444,7 +6444,7 @@
               <a:buNone/>
             </a:pPr>
             <a:r>
-              <a:rPr lang="en-US" sz="1250" dirty="0">
+              <a:rPr lang="en-US" sz="1200" dirty="0">
                 <a:solidFill>
                   <a:srgbClr val="3C444C"/>
                 </a:solidFill>
@@ -6454,7 +6454,7 @@
               </a:rPr>
               <a:t>You found out what that machine rewards, and who builds for it.</a:t>
             </a:r>
-            <a:endParaRPr lang="en-US" sz="1250" dirty="0"/>
+            <a:endParaRPr lang="en-US" sz="1200" dirty="0"/>
           </a:p>
         </p:txBody>
       </p:sp>

--- a/social-media/decks/topic-06-who-gets-to-decide.pptx
+++ b/social-media/decks/topic-06-who-gets-to-decide.pptx
@@ -515,7 +515,7 @@
           <a:p>
             <a:r>
               <a:rPr lang="en-US" dirty="0"/>
-              <a:t>Open by keeping the promise. You told them on day one that a hard question was coming, and this is it. Read the question off the slide and then stop talking. Do not let anybody answer yet.</a:t>
+              <a:t>Open by keeping the promise you made on day one. Read the question off the slide and then stop talking. Do not let anybody answer it yet.</a:t>
             </a:r>
             <a:endParaRPr lang="en-US" dirty="0"/>
           </a:p>
@@ -603,7 +603,7 @@
           <a:p>
             <a:r>
               <a:rPr lang="en-US" dirty="0"/>
-              <a:t>This is the AP move: the argument has a history. Four fights, four media, and they have heard of none of them. Ask what the four have in common before you turn the slide.</a:t>
+              <a:t>This is the historical move. Four arguments, four media, and they have heard of none of them. Ask what the four have in common before you turn the slide.</a:t>
             </a:r>
             <a:endParaRPr lang="en-US" dirty="0"/>
           </a:p>
@@ -691,7 +691,7 @@
           <a:p>
             <a:r>
               <a:rPr lang="en-US" dirty="0"/>
-              <a:t>Both halves matter. Every one ended in self-regulation under threat rather than in a law, which predicts something. And several of the strongest claims did not hold up, which predicts something else. Sincere and wrong is the pair to sit with.</a:t>
+              <a:t>Both halves matter. Every one ended in self-regulation under threat rather than in a law, which predicts something. And several of the strongest claims did not hold up, which predicts something else. Sincere and wrong is the pair worth sitting with.</a:t>
             </a:r>
             <a:endParaRPr lang="en-US" dirty="0"/>
           </a:p>
@@ -867,7 +867,7 @@
           <a:p>
             <a:r>
               <a:rPr lang="en-US" dirty="0"/>
-              <a:t>Section 230 is the one fact that changes how the argument feels: the current arrangement is one sentence that survived a court case, not the natural state of things. If they think the rules are permanent, they will argue as if nothing can change.</a:t>
+              <a:t>Section 230 is the fact that changes how the argument feels. The current arrangement is one sentence that survived a court case, not the natural state of things. If students think the rules are permanent, they will argue as though nothing can change.</a:t>
             </a:r>
             <a:endParaRPr lang="en-US" dirty="0"/>
           </a:p>
@@ -955,7 +955,7 @@
           <a:p>
             <a:r>
               <a:rPr lang="en-US" dirty="0"/>
-              <a:t>Return to the straw poll from the start and ask who moved and why. Then set the writing: the strongest version of the side they did not pick. Last line out loud, because it is the whole assessment: state it well enough that somebody who holds it would recognize it.</a:t>
+              <a:t>Return to the straw poll from the start and ask who moved and why. Then set the writing. Say out loud that Start Here and Push Further are both real answers, and that confidence is not graded. Read the last line, because it is the whole assessment.</a:t>
             </a:r>
             <a:endParaRPr lang="en-US" dirty="0"/>
           </a:p>
@@ -1043,7 +1043,7 @@
           <a:p>
             <a:r>
               <a:rPr lang="en-US" dirty="0"/>
-              <a:t>Two minutes, and the point is that today is earned. Four topics of machinery so that this can be an argument instead of a room of opinions. Read the Reading Target aloud: they are graded on the side they did not pick.</a:t>
+              <a:t>Two minutes, and the point is that today is earned. Five topics of machinery so that this can be an argument instead of a room of opinions. Read the goal at the bottom out loud: they are graded on the side they did not choose.</a:t>
             </a:r>
             <a:endParaRPr lang="en-US" dirty="0"/>
           </a:p>
@@ -1131,7 +1131,7 @@
           <a:p>
             <a:r>
               <a:rPr lang="en-US" dirty="0"/>
-              <a:t>Put the three answers up and take a straw poll by hands, without discussion. Note the split on the board and leave it there; you will come back to it at the end and ask who moved.</a:t>
+              <a:t>Put the three answers up and take a straw poll by hands, with no discussion. Write the split on the board and leave it there. You will come back to it at the end and ask who moved.</a:t>
             </a:r>
             <a:endParaRPr lang="en-US" dirty="0"/>
           </a:p>
@@ -1219,7 +1219,7 @@
           <a:p>
             <a:r>
               <a:rPr lang="en-US" dirty="0"/>
-              <a:t>This is the slide that decides whether the argument is any good. Say it plainly: nobody in this argument is stupid. If a position sounds obviously wrong, they are arguing with the weak version of it, and beating the weak version teaches nothing.</a:t>
+              <a:t>This slide decides whether the argument is any good. Say it plainly: every one of these positions is held by serious people. If a position seems obviously wrong, they are arguing with a weak version of it, and beating a weak version teaches nothing.</a:t>
             </a:r>
             <a:endParaRPr lang="en-US" dirty="0"/>
           </a:p>
@@ -1307,7 +1307,7 @@
           <a:p>
             <a:r>
               <a:rPr lang="en-US" dirty="0"/>
-              <a:t>Define tradeoff and then hold everybody to it for the rest of the block. An answer with no cost in it is not finished, and that is the standard you will grade against, so say so now rather than after.</a:t>
+              <a:t>Define tradeoff, then hold everybody to it for the rest of the block. An answer with no cost in it is not finished, and that is the standard you will grade against, so say so now rather than after.</a:t>
             </a:r>
             <a:endParaRPr lang="en-US" dirty="0"/>
           </a:p>
@@ -1395,7 +1395,7 @@
           <a:p>
             <a:r>
               <a:rPr lang="en-US" dirty="0"/>
-              <a:t>Take the strongest case first and make somebody who disagrees state it. Then the hardest question, and do not resolve it. Willpower against thousands of engineers is the honest shape of the problem, not a rhetorical trick.</a:t>
+              <a:t>Take the strongest case first, and have a student who disagrees with it state it. Then the hardest problem, and do not resolve it. Thousands of engineers against one person's willpower is the honest shape of the problem, not a trick.</a:t>
             </a:r>
             <a:endParaRPr lang="en-US" dirty="0"/>
           </a:p>
@@ -1483,7 +1483,7 @@
           <a:p>
             <a:r>
               <a:rPr lang="en-US" dirty="0"/>
-              <a:t>The self-regulation card is the one they underrate, so give it real weight: bad press does move companies. Then the hardest question, which is the cleanest conflict of interest in the unit. Let the silence sit.</a:t>
+              <a:t>The self-regulation card is the one students underrate, so give it real weight: bad publicity does move companies. Then the hardest problem, which is the clearest conflict of interest in the unit. Let the silence sit for a moment.</a:t>
             </a:r>
             <a:endParaRPr lang="en-US" dirty="0"/>
           </a:p>
@@ -1571,7 +1571,7 @@
           <a:p>
             <a:r>
               <a:rPr lang="en-US" dirty="0"/>
-              <a:t>Lead with the ordinary cases, because seatbelts and cigarette ads are the reason this position is not exotic. Then the hardest question, and read it slowly enough that they hear the same sentence twice. The Watch For belongs in the argument without settling it.</a:t>
+              <a:t>Lead with the ordinary examples, because seatbelts and cigarette advertising are what make this position normal rather than extreme. Then the hardest problem. Read it slowly: the same authority protects and controls. The Watch For belongs in the argument without settling it.</a:t>
             </a:r>
             <a:endParaRPr lang="en-US" dirty="0"/>
           </a:p>
@@ -2186,7 +2186,7 @@
         <p:spPr>
           <a:xfrm>
             <a:off x="548640" y="2286000"/>
-            <a:ext cx="6858000" cy="822960"/>
+            <a:ext cx="7040880" cy="731520"/>
           </a:xfrm>
           <a:prstGeom prst="rect">
             <a:avLst/>
@@ -2213,7 +2213,7 @@
                 <a:ea typeface="Cambria" pitchFamily="34" charset="-122"/>
                 <a:cs typeface="Cambria" pitchFamily="34" charset="-120"/>
               </a:rPr>
-              <a:t>I told you on the first day I would ask you a hard question at the end. Here it is.</a:t>
+              <a:t>On the first day I said I would ask you a hard question at the end. This is it.</a:t>
             </a:r>
             <a:endParaRPr lang="en-US" sz="1700" dirty="0"/>
           </a:p>
@@ -2227,7 +2227,7 @@
         </p:nvSpPr>
         <p:spPr>
           <a:xfrm>
-            <a:off x="548640" y="3401568"/>
+            <a:off x="548640" y="3200400"/>
             <a:ext cx="1828800" cy="329184"/>
           </a:xfrm>
           <a:prstGeom prst="roundRect">
@@ -2254,7 +2254,7 @@
         </p:nvSpPr>
         <p:spPr>
           <a:xfrm>
-            <a:off x="548640" y="3401568"/>
+            <a:off x="548640" y="3200400"/>
             <a:ext cx="1828800" cy="329184"/>
           </a:xfrm>
           <a:prstGeom prst="rect">
@@ -2296,7 +2296,7 @@
         </p:nvSpPr>
         <p:spPr>
           <a:xfrm>
-            <a:off x="2578608" y="3401568"/>
+            <a:off x="2578608" y="3200400"/>
             <a:ext cx="2331720" cy="329184"/>
           </a:xfrm>
           <a:prstGeom prst="roundRect">
@@ -2323,7 +2323,7 @@
         </p:nvSpPr>
         <p:spPr>
           <a:xfrm>
-            <a:off x="2578608" y="3401568"/>
+            <a:off x="2578608" y="3200400"/>
             <a:ext cx="2331720" cy="329184"/>
           </a:xfrm>
           <a:prstGeom prst="rect">
@@ -2503,7 +2503,7 @@
                 <a:ea typeface="Cambria" pitchFamily="34" charset="-122"/>
                 <a:cs typeface="Cambria" pitchFamily="34" charset="-120"/>
               </a:rPr>
-              <a:t>This argument has been had before</a:t>
+              <a:t>This argument has happened before</a:t>
             </a:r>
             <a:endParaRPr lang="en-US" sz="3000" dirty="0"/>
           </a:p>
@@ -3185,7 +3185,7 @@
                 <a:ea typeface="Calibri" pitchFamily="34" charset="-122"/>
                 <a:cs typeface="Calibri" pitchFamily="34" charset="-120"/>
               </a:rPr>
-              <a:t>A precedent is an earlier case that people point to when deciding a new one. This exact fight, about a new medium and what it does to young people, has run at least four times before.</a:t>
+              <a:t>A precedent is an earlier case that people point to when they decide a new one. This argument, about a new medium and what it does to young people, has happened at least four times before.</a:t>
             </a:r>
             <a:endParaRPr lang="en-US" sz="1300" dirty="0"/>
           </a:p>
@@ -3227,7 +3227,7 @@
                 <a:ea typeface="Calibri" pitchFamily="34" charset="-122"/>
                 <a:cs typeface="Calibri" pitchFamily="34" charset="-120"/>
               </a:rPr>
-              <a:t>Look at what the four have in common.</a:t>
+              <a:t>Those four have two things in common.</a:t>
             </a:r>
             <a:endParaRPr lang="en-US" sz="1400" dirty="0"/>
           </a:p>
@@ -3337,7 +3337,7 @@
                 <a:ea typeface="Courier New" pitchFamily="34" charset="-122"/>
                 <a:cs typeface="Courier New" pitchFamily="34" charset="-120"/>
               </a:rPr>
-              <a:t>THE METHOD · WHAT IT PREDICTS</a:t>
+              <a:t>THE METHOD · WHAT IT TELLS YOU</a:t>
             </a:r>
             <a:endParaRPr lang="en-US" sz="1000" dirty="0"/>
           </a:p>
@@ -3428,7 +3428,7 @@
         <p:spPr>
           <a:xfrm>
             <a:off x="804672" y="1847088"/>
-            <a:ext cx="3328416" cy="548640"/>
+            <a:ext cx="3328416" cy="219456"/>
           </a:xfrm>
           <a:prstGeom prst="rect">
             <a:avLst/>
@@ -3447,7 +3447,49 @@
               <a:buNone/>
             </a:pPr>
             <a:r>
-              <a:rPr lang="en-US" sz="3400" b="1" dirty="0">
+              <a:rPr lang="en-US" sz="900" b="1" dirty="0">
+                <a:solidFill>
+                  <a:srgbClr val="8A1A1A"/>
+                </a:solidFill>
+                <a:latin typeface="Courier New" pitchFamily="34" charset="0"/>
+                <a:ea typeface="Courier New" pitchFamily="34" charset="-122"/>
+                <a:cs typeface="Courier New" pitchFamily="34" charset="-120"/>
+              </a:rPr>
+              <a:t>FIRST</a:t>
+            </a:r>
+            <a:endParaRPr lang="en-US" sz="900" dirty="0"/>
+          </a:p>
+        </p:txBody>
+      </p:sp>
+      <p:sp>
+        <p:nvSpPr>
+          <p:cNvPr id="6" name="Text 4"/>
+          <p:cNvSpPr/>
+          <p:nvPr/>
+        </p:nvSpPr>
+        <p:spPr>
+          <a:xfrm>
+            <a:off x="804672" y="2103120"/>
+            <a:ext cx="3328416" cy="512064"/>
+          </a:xfrm>
+          <a:prstGeom prst="rect">
+            <a:avLst/>
+          </a:prstGeom>
+          <a:noFill/>
+          <a:ln/>
+        </p:spPr>
+        <p:txBody>
+          <a:bodyPr wrap="square" lIns="0" tIns="0" rIns="0" bIns="0" rtlCol="0" anchor="t"/>
+          <a:lstStyle/>
+          <a:p>
+            <a:pPr algn="l" indent="0" marL="0">
+              <a:lnSpc>
+                <a:spcPct val="106000"/>
+              </a:lnSpc>
+              <a:buNone/>
+            </a:pPr>
+            <a:r>
+              <a:rPr lang="en-US" sz="3200" b="1" dirty="0">
                 <a:solidFill>
                   <a:srgbClr val="8A1A1A"/>
                 </a:solidFill>
@@ -3457,20 +3499,20 @@
               </a:rPr>
               <a:t>4 of 4</a:t>
             </a:r>
-            <a:endParaRPr lang="en-US" sz="3400" dirty="0"/>
-          </a:p>
-        </p:txBody>
-      </p:sp>
-      <p:sp>
-        <p:nvSpPr>
-          <p:cNvPr id="6" name="Text 4"/>
-          <p:cNvSpPr/>
-          <p:nvPr/>
-        </p:nvSpPr>
-        <p:spPr>
-          <a:xfrm>
-            <a:off x="804672" y="2450592"/>
-            <a:ext cx="3328416" cy="914400"/>
+            <a:endParaRPr lang="en-US" sz="3200" dirty="0"/>
+          </a:p>
+        </p:txBody>
+      </p:sp>
+      <p:sp>
+        <p:nvSpPr>
+          <p:cNvPr id="7" name="Text 5"/>
+          <p:cNvSpPr/>
+          <p:nvPr/>
+        </p:nvSpPr>
+        <p:spPr>
+          <a:xfrm>
+            <a:off x="804672" y="2688336"/>
+            <a:ext cx="3328416" cy="731520"/>
           </a:xfrm>
           <a:prstGeom prst="rect">
             <a:avLst/>
@@ -3484,12 +3526,12 @@
           <a:p>
             <a:pPr algn="l" indent="0" marL="0">
               <a:lnSpc>
-                <a:spcPct val="116000"/>
-              </a:lnSpc>
-              <a:buNone/>
-            </a:pPr>
-            <a:r>
-              <a:rPr lang="en-US" sz="1350" dirty="0">
+                <a:spcPct val="114000"/>
+              </a:lnSpc>
+              <a:buNone/>
+            </a:pPr>
+            <a:r>
+              <a:rPr lang="en-US" sz="1300" dirty="0">
                 <a:solidFill>
                   <a:srgbClr val="14171A"/>
                 </a:solidFill>
@@ -3497,15 +3539,15 @@
                 <a:ea typeface="Calibri" pitchFamily="34" charset="-122"/>
                 <a:cs typeface="Calibri" pitchFamily="34" charset="-120"/>
               </a:rPr>
-              <a:t>ended in industry self-regulation under threat of government action, rather than in a law.</a:t>
-            </a:r>
-            <a:endParaRPr lang="en-US" sz="1350" dirty="0"/>
-          </a:p>
-        </p:txBody>
-      </p:sp>
-      <p:sp>
-        <p:nvSpPr>
-          <p:cNvPr id="7" name="Shape 5"/>
+              <a:t>ended with the industry regulating itself under the threat of government action, rather than in a law.</a:t>
+            </a:r>
+            <a:endParaRPr lang="en-US" sz="1300" dirty="0"/>
+          </a:p>
+        </p:txBody>
+      </p:sp>
+      <p:sp>
+        <p:nvSpPr>
+          <p:cNvPr id="8" name="Shape 6"/>
           <p:cNvSpPr/>
           <p:nvPr/>
         </p:nvSpPr>
@@ -3539,7 +3581,7 @@
       </p:sp>
       <p:sp>
         <p:nvSpPr>
-          <p:cNvPr id="8" name="Text 6"/>
+          <p:cNvPr id="9" name="Text 7"/>
           <p:cNvSpPr/>
           <p:nvPr/>
         </p:nvSpPr>
@@ -3573,7 +3615,7 @@
                 <a:ea typeface="Courier New" pitchFamily="34" charset="-122"/>
                 <a:cs typeface="Courier New" pitchFamily="34" charset="-120"/>
               </a:rPr>
-              <a:t>AND WORTH KNOWING</a:t>
+              <a:t>SECOND</a:t>
             </a:r>
             <a:endParaRPr lang="en-US" sz="900" dirty="0"/>
           </a:p>
@@ -3581,7 +3623,7 @@
       </p:sp>
       <p:sp>
         <p:nvSpPr>
-          <p:cNvPr id="9" name="Text 7"/>
+          <p:cNvPr id="10" name="Text 8"/>
           <p:cNvSpPr/>
           <p:nvPr/>
         </p:nvSpPr>
@@ -3615,7 +3657,7 @@
                 <a:ea typeface="Calibri" pitchFamily="34" charset="-122"/>
                 <a:cs typeface="Calibri" pitchFamily="34" charset="-120"/>
               </a:rPr>
-              <a:t>The strongest claims made in several of those panics did not hold up later. The comic book research was largely discredited. The video game research is still contested.</a:t>
+              <a:t>The strongest claims made during several of those arguments did not hold up later. The comic book research was largely discredited. The video game research is still contested.</a:t>
             </a:r>
             <a:endParaRPr lang="en-US" sz="1300" dirty="0"/>
           </a:p>
@@ -3623,7 +3665,7 @@
       </p:sp>
       <p:sp>
         <p:nvSpPr>
-          <p:cNvPr id="10" name="Text 8"/>
+          <p:cNvPr id="11" name="Text 9"/>
           <p:cNvSpPr/>
           <p:nvPr/>
         </p:nvSpPr>
@@ -3657,7 +3699,7 @@
                 <a:ea typeface="Calibri" pitchFamily="34" charset="-122"/>
                 <a:cs typeface="Calibri" pitchFamily="34" charset="-120"/>
               </a:rPr>
-              <a:t>That history does not tell you the answer. It tells you that "this new thing is harming children" has been said before, sometimes correctly and sometimes not, and that the people saying it were sincere either way.</a:t>
+              <a:t>That history does not tell you the answer. It tells you that "this new thing is harming children" has been said before, sometimes correctly and sometimes not, and that the people saying it believed it either way.</a:t>
             </a:r>
             <a:endParaRPr lang="en-US" sz="1300" dirty="0"/>
           </a:p>
@@ -3665,7 +3707,7 @@
       </p:sp>
       <p:sp>
         <p:nvSpPr>
-          <p:cNvPr id="12" name="Text 9"/>
+          <p:cNvPr id="13" name="Text 10"/>
           <p:cNvSpPr/>
           <p:nvPr/>
         </p:nvSpPr>
@@ -3767,7 +3809,7 @@
                 <a:ea typeface="Courier New" pitchFamily="34" charset="-122"/>
                 <a:cs typeface="Courier New" pitchFamily="34" charset="-120"/>
               </a:rPr>
-              <a:t>AP SKILL PARALLEL</a:t>
+              <a:t>SKILL FOCUS · USING A PRECEDENT</a:t>
             </a:r>
             <a:endParaRPr lang="en-US" sz="1000" dirty="0"/>
           </a:p>
@@ -3877,7 +3919,7 @@
               <a:buNone/>
             </a:pPr>
             <a:r>
-              <a:rPr lang="en-US" sz="1500" b="1" dirty="0">
+              <a:rPr lang="en-US" sz="1400" b="1" dirty="0">
                 <a:solidFill>
                   <a:srgbClr val="14171A"/>
                 </a:solidFill>
@@ -3885,9 +3927,9 @@
                 <a:ea typeface="Cambria" pitchFamily="34" charset="-122"/>
                 <a:cs typeface="Cambria" pitchFamily="34" charset="-120"/>
               </a:rPr>
-              <a:t>Personalized</a:t>
-            </a:r>
-            <a:endParaRPr lang="en-US" sz="1500" dirty="0"/>
+              <a:t>It is personalized</a:t>
+            </a:r>
+            <a:endParaRPr lang="en-US" sz="1400" dirty="0"/>
           </a:p>
         </p:txBody>
       </p:sp>
@@ -3995,7 +4037,7 @@
               <a:buNone/>
             </a:pPr>
             <a:r>
-              <a:rPr lang="en-US" sz="1500" b="1" dirty="0">
+              <a:rPr lang="en-US" sz="1400" b="1" dirty="0">
                 <a:solidFill>
                   <a:srgbClr val="14171A"/>
                 </a:solidFill>
@@ -4003,9 +4045,9 @@
                 <a:ea typeface="Cambria" pitchFamily="34" charset="-122"/>
                 <a:cs typeface="Cambria" pitchFamily="34" charset="-120"/>
               </a:rPr>
-              <a:t>Always with you</a:t>
-            </a:r>
-            <a:endParaRPr lang="en-US" sz="1500" dirty="0"/>
+              <a:t>It is always with you</a:t>
+            </a:r>
+            <a:endParaRPr lang="en-US" sz="1400" dirty="0"/>
           </a:p>
         </p:txBody>
       </p:sp>
@@ -4045,7 +4087,7 @@
                 <a:ea typeface="Calibri" pitchFamily="34" charset="-122"/>
                 <a:cs typeface="Calibri" pitchFamily="34" charset="-120"/>
               </a:rPr>
-              <a:t>It is not a thing you go to and then leave.</a:t>
+              <a:t>It is not a thing you go to and then leave behind.</a:t>
             </a:r>
             <a:endParaRPr lang="en-US" sz="1250" dirty="0"/>
           </a:p>
@@ -4113,7 +4155,7 @@
               <a:buNone/>
             </a:pPr>
             <a:r>
-              <a:rPr lang="en-US" sz="1500" b="1" dirty="0">
+              <a:rPr lang="en-US" sz="1400" b="1" dirty="0">
                 <a:solidFill>
                   <a:srgbClr val="14171A"/>
                 </a:solidFill>
@@ -4123,7 +4165,7 @@
               </a:rPr>
               <a:t>It responds to you</a:t>
             </a:r>
-            <a:endParaRPr lang="en-US" sz="1500" dirty="0"/>
+            <a:endParaRPr lang="en-US" sz="1400" dirty="0"/>
           </a:p>
         </p:txBody>
       </p:sp>
@@ -4163,7 +4205,7 @@
                 <a:ea typeface="Calibri" pitchFamily="34" charset="-122"/>
                 <a:cs typeface="Calibri" pitchFamily="34" charset="-120"/>
               </a:rPr>
-              <a:t>What you do changes what it does next.</a:t>
+              <a:t>What you do changes what it shows you next.</a:t>
             </a:r>
             <a:endParaRPr lang="en-US" sz="1250" dirty="0"/>
           </a:p>
@@ -4399,7 +4441,7 @@
                 <a:ea typeface="Cambria" pitchFamily="34" charset="-122"/>
                 <a:cs typeface="Cambria" pitchFamily="34" charset="-120"/>
               </a:rPr>
-              <a:t>One sentence, from 1996</a:t>
+              <a:t>One sentence, written in 1996</a:t>
             </a:r>
             <a:endParaRPr lang="en-US" sz="3000" dirty="0"/>
           </a:p>
@@ -4559,7 +4601,7 @@
                 <a:ea typeface="Calibri" pitchFamily="34" charset="-122"/>
                 <a:cs typeface="Calibri" pitchFamily="34" charset="-120"/>
               </a:rPr>
-              <a:t>Section 230 of the Communications Decency Act. A large part of why the internet looks the way it does.</a:t>
+              <a:t>That sentence becomes part of Section 230 of the Communications Decency Act.</a:t>
             </a:r>
             <a:endParaRPr lang="en-US" sz="1250" dirty="0"/>
           </a:p>
@@ -4643,7 +4685,7 @@
                 <a:ea typeface="Calibri" pitchFamily="34" charset="-122"/>
                 <a:cs typeface="Calibri" pitchFamily="34" charset="-120"/>
               </a:rPr>
-              <a:t>The rest of that law is struck down by the Supreme Court as a violation of free speech. Section 230 survives.</a:t>
+              <a:t>The Supreme Court strikes down the rest of the law for violating free speech. Section 230 survives.</a:t>
             </a:r>
             <a:endParaRPr lang="en-US" sz="1250" dirty="0"/>
           </a:p>
@@ -4727,7 +4769,7 @@
                 <a:ea typeface="Calibri" pitchFamily="34" charset="-122"/>
                 <a:cs typeface="Calibri" pitchFamily="34" charset="-120"/>
               </a:rPr>
-              <a:t>Politicians in both parties have proposed repealing or narrowing it, for opposite reasons.</a:t>
+              <a:t>Politicians in both parties have proposed repealing it or narrowing it, for opposite reasons.</a:t>
             </a:r>
             <a:endParaRPr lang="en-US" sz="1250" dirty="0"/>
           </a:p>
@@ -4811,7 +4853,7 @@
                 <a:ea typeface="Calibri" pitchFamily="34" charset="-122"/>
                 <a:cs typeface="Calibri" pitchFamily="34" charset="-120"/>
               </a:rPr>
-              <a:t>It is still there, and people are still fighting over it right now.</a:t>
+              <a:t>It is still in place, and people are still arguing about it.</a:t>
             </a:r>
             <a:endParaRPr lang="en-US" sz="1250" dirty="0"/>
           </a:p>
@@ -4853,7 +4895,7 @@
                 <a:ea typeface="Calibri" pitchFamily="34" charset="-122"/>
                 <a:cs typeface="Calibri" pitchFamily="34" charset="-120"/>
               </a:rPr>
-              <a:t>The current arrangement is not the natural state of things.</a:t>
+              <a:t>The arrangement we have now was not inevitable.</a:t>
             </a:r>
             <a:endParaRPr lang="en-US" sz="1350" dirty="0"/>
           </a:p>
@@ -4963,7 +5005,7 @@
                 <a:ea typeface="Courier New" pitchFamily="34" charset="-122"/>
                 <a:cs typeface="Courier New" pitchFamily="34" charset="-120"/>
               </a:rPr>
-              <a:t>BEREADY · 10-SECOND TAKEAWAY</a:t>
+              <a:t>SUMMARY</a:t>
             </a:r>
             <a:endParaRPr lang="en-US" sz="1000" dirty="0"/>
           </a:p>
@@ -5005,7 +5047,7 @@
                 <a:ea typeface="Cambria" pitchFamily="34" charset="-122"/>
                 <a:cs typeface="Cambria" pitchFamily="34" charset="-120"/>
               </a:rPr>
-              <a:t>Three answers, each with a real case and a real cost. Your job is not to win the argument today.</a:t>
+              <a:t>There are three answers, and each one has a real case and a real cost. Your job today is not to win the argument.</a:t>
             </a:r>
             <a:endParaRPr lang="en-US" sz="1850" dirty="0"/>
           </a:p>
@@ -5020,11 +5062,11 @@
         <p:spPr>
           <a:xfrm>
             <a:off x="548640" y="1627632"/>
-            <a:ext cx="8046720" cy="2286000"/>
+            <a:ext cx="8046720" cy="2395728"/>
           </a:xfrm>
           <a:prstGeom prst="roundRect">
             <a:avLst>
-              <a:gd name="adj" fmla="val 2400"/>
+              <a:gd name="adj" fmla="val 2290"/>
             </a:avLst>
           </a:prstGeom>
           <a:solidFill>
@@ -5074,7 +5116,7 @@
                 <a:ea typeface="Courier New" pitchFamily="34" charset="-122"/>
                 <a:cs typeface="Courier New" pitchFamily="34" charset="-120"/>
               </a:rPr>
-              <a:t>CHECK YOUR UNDERSTANDING</a:t>
+              <a:t>WHAT YOU WILL WRITE</a:t>
             </a:r>
             <a:endParaRPr lang="en-US" sz="900" dirty="0"/>
           </a:p>
@@ -5195,7 +5237,7 @@
         <p:spPr>
           <a:xfrm>
             <a:off x="1243584" y="2359152"/>
-            <a:ext cx="7040880" cy="402336"/>
+            <a:ext cx="7040880" cy="420624"/>
           </a:xfrm>
           <a:prstGeom prst="rect">
             <a:avLst/>
@@ -5222,7 +5264,7 @@
                 <a:ea typeface="Calibri" pitchFamily="34" charset="-122"/>
                 <a:cs typeface="Calibri" pitchFamily="34" charset="-120"/>
               </a:rPr>
-              <a:t>Pick the position you do NOT hold. State the strongest version of it, in your own words, as well as you possibly can.</a:t>
+              <a:t>Choose the position you do not agree with. Write the strongest case for it, in your own words.</a:t>
             </a:r>
             <a:endParaRPr lang="en-US" sz="1200" dirty="0"/>
           </a:p>
@@ -5236,7 +5278,7 @@
         </p:nvSpPr>
         <p:spPr>
           <a:xfrm>
-            <a:off x="804672" y="2779776"/>
+            <a:off x="804672" y="2798064"/>
             <a:ext cx="310896" cy="310896"/>
           </a:xfrm>
           <a:prstGeom prst="ellipse">
@@ -5261,7 +5303,7 @@
         </p:nvSpPr>
         <p:spPr>
           <a:xfrm>
-            <a:off x="804672" y="2779776"/>
+            <a:off x="804672" y="2798064"/>
             <a:ext cx="310896" cy="310896"/>
           </a:xfrm>
           <a:prstGeom prst="rect">
@@ -5300,7 +5342,7 @@
         </p:nvSpPr>
         <p:spPr>
           <a:xfrm>
-            <a:off x="1243584" y="2761488"/>
+            <a:off x="1243584" y="2779776"/>
             <a:ext cx="7040880" cy="201168"/>
           </a:xfrm>
           <a:prstGeom prst="rect">
@@ -5342,8 +5384,8 @@
         </p:nvSpPr>
         <p:spPr>
           <a:xfrm>
-            <a:off x="1243584" y="2962656"/>
-            <a:ext cx="7040880" cy="402336"/>
+            <a:off x="1243584" y="2980944"/>
+            <a:ext cx="7040880" cy="420624"/>
           </a:xfrm>
           <a:prstGeom prst="rect">
             <a:avLst/>
@@ -5370,7 +5412,7 @@
                 <a:ea typeface="Calibri" pitchFamily="34" charset="-122"/>
                 <a:cs typeface="Calibri" pitchFamily="34" charset="-120"/>
               </a:rPr>
-              <a:t>Pick one earlier fight: comic books, television, music lyrics, or video games. What happened, and what does it predict about this one?</a:t>
+              <a:t>Choose one earlier argument: comic books, television, music lyrics, or video games. Describe what happened, then name one way social media is different from that medium.</a:t>
             </a:r>
             <a:endParaRPr lang="en-US" sz="1200" dirty="0"/>
           </a:p>
@@ -5384,7 +5426,7 @@
         </p:nvSpPr>
         <p:spPr>
           <a:xfrm>
-            <a:off x="804672" y="3383280"/>
+            <a:off x="804672" y="3419856"/>
             <a:ext cx="310896" cy="310896"/>
           </a:xfrm>
           <a:prstGeom prst="ellipse">
@@ -5409,7 +5451,7 @@
         </p:nvSpPr>
         <p:spPr>
           <a:xfrm>
-            <a:off x="804672" y="3383280"/>
+            <a:off x="804672" y="3419856"/>
             <a:ext cx="310896" cy="310896"/>
           </a:xfrm>
           <a:prstGeom prst="rect">
@@ -5448,7 +5490,7 @@
         </p:nvSpPr>
         <p:spPr>
           <a:xfrm>
-            <a:off x="1243584" y="3364992"/>
+            <a:off x="1243584" y="3401568"/>
             <a:ext cx="7040880" cy="201168"/>
           </a:xfrm>
           <a:prstGeom prst="rect">
@@ -5490,8 +5532,8 @@
         </p:nvSpPr>
         <p:spPr>
           <a:xfrm>
-            <a:off x="1243584" y="3566160"/>
-            <a:ext cx="7040880" cy="402336"/>
+            <a:off x="1243584" y="3602736"/>
+            <a:ext cx="7040880" cy="420624"/>
           </a:xfrm>
           <a:prstGeom prst="rect">
             <a:avLst/>
@@ -5518,7 +5560,7 @@
                 <a:ea typeface="Calibri" pitchFamily="34" charset="-122"/>
                 <a:cs typeface="Calibri" pitchFamily="34" charset="-120"/>
               </a:rPr>
-              <a:t>What evidence would change your mind? Be specific enough that somebody could go looking for it.</a:t>
+              <a:t>What evidence would change your mind about who should decide? Be specific enough that somebody could go looking for it.</a:t>
             </a:r>
             <a:endParaRPr lang="en-US" sz="1200" dirty="0"/>
           </a:p>
@@ -5532,7 +5574,7 @@
         </p:nvSpPr>
         <p:spPr>
           <a:xfrm>
-            <a:off x="548640" y="4096512"/>
+            <a:off x="548640" y="4114800"/>
             <a:ext cx="7863840" cy="310896"/>
           </a:xfrm>
           <a:prstGeom prst="rect">
@@ -5704,7 +5746,7 @@
               <a:buNone/>
             </a:pPr>
             <a:r>
-              <a:rPr lang="en-US" sz="2500" b="1" dirty="0">
+              <a:rPr lang="en-US" sz="3000" b="1" dirty="0">
                 <a:solidFill>
                   <a:srgbClr val="14171A"/>
                 </a:solidFill>
@@ -5712,9 +5754,9 @@
                 <a:ea typeface="Cambria" pitchFamily="34" charset="-122"/>
                 <a:cs typeface="Cambria" pitchFamily="34" charset="-120"/>
               </a:rPr>
-              <a:t>Everything so far was so that today is a real argument</a:t>
-            </a:r>
-            <a:endParaRPr lang="en-US" sz="2500" dirty="0"/>
+              <a:t>What today builds on</a:t>
+            </a:r>
+            <a:endParaRPr lang="en-US" sz="3000" dirty="0"/>
           </a:p>
         </p:txBody>
       </p:sp>
@@ -5852,7 +5894,7 @@
               <a:buNone/>
             </a:pPr>
             <a:r>
-              <a:rPr lang="en-US" sz="1200" dirty="0">
+              <a:rPr lang="en-US" sz="1250" dirty="0">
                 <a:solidFill>
                   <a:srgbClr val="3C444C"/>
                 </a:solidFill>
@@ -5862,7 +5904,7 @@
               </a:rPr>
               <a:t>You built the chain from opening an app to a company getting paid.</a:t>
             </a:r>
-            <a:endParaRPr lang="en-US" sz="1200" dirty="0"/>
+            <a:endParaRPr lang="en-US" sz="1250" dirty="0"/>
           </a:p>
         </p:txBody>
       </p:sp>
@@ -6000,7 +6042,7 @@
               <a:buNone/>
             </a:pPr>
             <a:r>
-              <a:rPr lang="en-US" sz="1200" dirty="0">
+              <a:rPr lang="en-US" sz="1250" dirty="0">
                 <a:solidFill>
                   <a:srgbClr val="3C444C"/>
                 </a:solidFill>
@@ -6008,9 +6050,9 @@
                 <a:ea typeface="Calibri" pitchFamily="34" charset="-122"/>
                 <a:cs typeface="Calibri" pitchFamily="34" charset="-120"/>
               </a:rPr>
-              <a:t>You took the film apart the way you took your app apart.</a:t>
-            </a:r>
-            <a:endParaRPr lang="en-US" sz="1200" dirty="0"/>
+              <a:t>You took a film apart the same way you took your app apart.</a:t>
+            </a:r>
+            <a:endParaRPr lang="en-US" sz="1250" dirty="0"/>
           </a:p>
         </p:txBody>
       </p:sp>
@@ -6148,7 +6190,7 @@
               <a:buNone/>
             </a:pPr>
             <a:r>
-              <a:rPr lang="en-US" sz="1200" dirty="0">
+              <a:rPr lang="en-US" sz="1250" dirty="0">
                 <a:solidFill>
                   <a:srgbClr val="3C444C"/>
                 </a:solidFill>
@@ -6156,9 +6198,9 @@
                 <a:ea typeface="Calibri" pitchFamily="34" charset="-122"/>
                 <a:cs typeface="Calibri" pitchFamily="34" charset="-120"/>
               </a:rPr>
-              <a:t>You opened the box almost every chain had in the middle.</a:t>
-            </a:r>
-            <a:endParaRPr lang="en-US" sz="1200" dirty="0"/>
+              <a:t>You opened the box that almost every chain had in the middle.</a:t>
+            </a:r>
+            <a:endParaRPr lang="en-US" sz="1250" dirty="0"/>
           </a:p>
         </p:txBody>
       </p:sp>
@@ -6296,7 +6338,7 @@
               <a:buNone/>
             </a:pPr>
             <a:r>
-              <a:rPr lang="en-US" sz="1200" dirty="0">
+              <a:rPr lang="en-US" sz="1250" dirty="0">
                 <a:solidFill>
                   <a:srgbClr val="3C444C"/>
                 </a:solidFill>
@@ -6304,9 +6346,9 @@
                 <a:ea typeface="Calibri" pitchFamily="34" charset="-122"/>
                 <a:cs typeface="Calibri" pitchFamily="34" charset="-120"/>
               </a:rPr>
-              <a:t>You read the evidence about effects, and what a record keeps.</a:t>
-            </a:r>
-            <a:endParaRPr lang="en-US" sz="1200" dirty="0"/>
+              <a:t>You read the evidence about effects, and looked up your own record.</a:t>
+            </a:r>
+            <a:endParaRPr lang="en-US" sz="1250" dirty="0"/>
           </a:p>
         </p:txBody>
       </p:sp>
@@ -6444,7 +6486,7 @@
               <a:buNone/>
             </a:pPr>
             <a:r>
-              <a:rPr lang="en-US" sz="1200" dirty="0">
+              <a:rPr lang="en-US" sz="1250" dirty="0">
                 <a:solidFill>
                   <a:srgbClr val="3C444C"/>
                 </a:solidFill>
@@ -6452,9 +6494,9 @@
                 <a:ea typeface="Calibri" pitchFamily="34" charset="-122"/>
                 <a:cs typeface="Calibri" pitchFamily="34" charset="-120"/>
               </a:rPr>
-              <a:t>You found out what that machine rewards, and who builds for it.</a:t>
-            </a:r>
-            <a:endParaRPr lang="en-US" sz="1200" dirty="0"/>
+              <a:t>You followed a false story through the system.</a:t>
+            </a:r>
+            <a:endParaRPr lang="en-US" sz="1250" dirty="0"/>
           </a:p>
         </p:txBody>
       </p:sp>
@@ -6736,7 +6778,7 @@
         </p:nvSpPr>
         <p:spPr>
           <a:xfrm>
-            <a:off x="548640" y="2157984"/>
+            <a:off x="548640" y="2194560"/>
             <a:ext cx="2560320" cy="1371600"/>
           </a:xfrm>
           <a:prstGeom prst="roundRect">
@@ -6770,7 +6812,7 @@
         </p:nvSpPr>
         <p:spPr>
           <a:xfrm>
-            <a:off x="768096" y="2359152"/>
+            <a:off x="768096" y="2377440"/>
             <a:ext cx="347472" cy="347472"/>
           </a:xfrm>
           <a:prstGeom prst="ellipse">
@@ -6795,7 +6837,7 @@
         </p:nvSpPr>
         <p:spPr>
           <a:xfrm>
-            <a:off x="768096" y="2359152"/>
+            <a:off x="768096" y="2377440"/>
             <a:ext cx="347472" cy="347472"/>
           </a:xfrm>
           <a:prstGeom prst="rect">
@@ -6854,7 +6896,7 @@
               <a:buNone/>
             </a:pPr>
             <a:r>
-              <a:rPr lang="en-US" sz="1600" b="1" dirty="0">
+              <a:rPr lang="en-US" sz="1450" b="1" dirty="0">
                 <a:solidFill>
                   <a:srgbClr val="14171A"/>
                 </a:solidFill>
@@ -6862,9 +6904,9 @@
                 <a:ea typeface="Cambria" pitchFamily="34" charset="-122"/>
                 <a:cs typeface="Cambria" pitchFamily="34" charset="-120"/>
               </a:rPr>
-              <a:t>You</a:t>
-            </a:r>
-            <a:endParaRPr lang="en-US" sz="1600" dirty="0"/>
+              <a:t>You decide</a:t>
+            </a:r>
+            <a:endParaRPr lang="en-US" sz="1450" dirty="0"/>
           </a:p>
         </p:txBody>
       </p:sp>
@@ -6877,7 +6919,7 @@
         <p:spPr>
           <a:xfrm>
             <a:off x="768096" y="3108960"/>
-            <a:ext cx="2121408" cy="274320"/>
+            <a:ext cx="2121408" cy="402336"/>
           </a:xfrm>
           <a:prstGeom prst="rect">
             <a:avLst/>
@@ -6896,7 +6938,7 @@
               <a:buNone/>
             </a:pPr>
             <a:r>
-              <a:rPr lang="en-US" sz="1250" dirty="0">
+              <a:rPr lang="en-US" sz="1200" dirty="0">
                 <a:solidFill>
                   <a:srgbClr val="3C444C"/>
                 </a:solidFill>
@@ -6904,9 +6946,9 @@
                 <a:ea typeface="Calibri" pitchFamily="34" charset="-122"/>
                 <a:cs typeface="Calibri" pitchFamily="34" charset="-120"/>
               </a:rPr>
-              <a:t>It is your attention.</a:t>
-            </a:r>
-            <a:endParaRPr lang="en-US" sz="1250" dirty="0"/>
+              <a:t>It is your attention and your phone.</a:t>
+            </a:r>
+            <a:endParaRPr lang="en-US" sz="1200" dirty="0"/>
           </a:p>
         </p:txBody>
       </p:sp>
@@ -6918,7 +6960,7 @@
         </p:nvSpPr>
         <p:spPr>
           <a:xfrm>
-            <a:off x="3291840" y="2157984"/>
+            <a:off x="3291840" y="2194560"/>
             <a:ext cx="2560320" cy="1371600"/>
           </a:xfrm>
           <a:prstGeom prst="roundRect">
@@ -6952,7 +6994,7 @@
         </p:nvSpPr>
         <p:spPr>
           <a:xfrm>
-            <a:off x="3511296" y="2359152"/>
+            <a:off x="3511296" y="2377440"/>
             <a:ext cx="347472" cy="347472"/>
           </a:xfrm>
           <a:prstGeom prst="ellipse">
@@ -6977,7 +7019,7 @@
         </p:nvSpPr>
         <p:spPr>
           <a:xfrm>
-            <a:off x="3511296" y="2359152"/>
+            <a:off x="3511296" y="2377440"/>
             <a:ext cx="347472" cy="347472"/>
           </a:xfrm>
           <a:prstGeom prst="rect">
@@ -7036,7 +7078,7 @@
               <a:buNone/>
             </a:pPr>
             <a:r>
-              <a:rPr lang="en-US" sz="1600" b="1" dirty="0">
+              <a:rPr lang="en-US" sz="1450" b="1" dirty="0">
                 <a:solidFill>
                   <a:srgbClr val="14171A"/>
                 </a:solidFill>
@@ -7044,9 +7086,9 @@
                 <a:ea typeface="Cambria" pitchFamily="34" charset="-122"/>
                 <a:cs typeface="Cambria" pitchFamily="34" charset="-120"/>
               </a:rPr>
-              <a:t>The company</a:t>
-            </a:r>
-            <a:endParaRPr lang="en-US" sz="1600" dirty="0"/>
+              <a:t>The company decides</a:t>
+            </a:r>
+            <a:endParaRPr lang="en-US" sz="1450" dirty="0"/>
           </a:p>
         </p:txBody>
       </p:sp>
@@ -7059,7 +7101,7 @@
         <p:spPr>
           <a:xfrm>
             <a:off x="3511296" y="3108960"/>
-            <a:ext cx="2121408" cy="274320"/>
+            <a:ext cx="2121408" cy="402336"/>
           </a:xfrm>
           <a:prstGeom prst="rect">
             <a:avLst/>
@@ -7078,7 +7120,7 @@
               <a:buNone/>
             </a:pPr>
             <a:r>
-              <a:rPr lang="en-US" sz="1250" dirty="0">
+              <a:rPr lang="en-US" sz="1200" dirty="0">
                 <a:solidFill>
                   <a:srgbClr val="3C444C"/>
                 </a:solidFill>
@@ -7086,9 +7128,9 @@
                 <a:ea typeface="Calibri" pitchFamily="34" charset="-122"/>
                 <a:cs typeface="Calibri" pitchFamily="34" charset="-120"/>
               </a:rPr>
-              <a:t>They built it.</a:t>
-            </a:r>
-            <a:endParaRPr lang="en-US" sz="1250" dirty="0"/>
+              <a:t>They built it and they pay for it.</a:t>
+            </a:r>
+            <a:endParaRPr lang="en-US" sz="1200" dirty="0"/>
           </a:p>
         </p:txBody>
       </p:sp>
@@ -7100,7 +7142,7 @@
         </p:nvSpPr>
         <p:spPr>
           <a:xfrm>
-            <a:off x="6035040" y="2157984"/>
+            <a:off x="6035040" y="2194560"/>
             <a:ext cx="2560320" cy="1371600"/>
           </a:xfrm>
           <a:prstGeom prst="roundRect">
@@ -7134,7 +7176,7 @@
         </p:nvSpPr>
         <p:spPr>
           <a:xfrm>
-            <a:off x="6254496" y="2359152"/>
+            <a:off x="6254496" y="2377440"/>
             <a:ext cx="347472" cy="347472"/>
           </a:xfrm>
           <a:prstGeom prst="ellipse">
@@ -7159,7 +7201,7 @@
         </p:nvSpPr>
         <p:spPr>
           <a:xfrm>
-            <a:off x="6254496" y="2359152"/>
+            <a:off x="6254496" y="2377440"/>
             <a:ext cx="347472" cy="347472"/>
           </a:xfrm>
           <a:prstGeom prst="rect">
@@ -7218,7 +7260,7 @@
               <a:buNone/>
             </a:pPr>
             <a:r>
-              <a:rPr lang="en-US" sz="1600" b="1" dirty="0">
+              <a:rPr lang="en-US" sz="1450" b="1" dirty="0">
                 <a:solidFill>
                   <a:srgbClr val="14171A"/>
                 </a:solidFill>
@@ -7226,9 +7268,9 @@
                 <a:ea typeface="Cambria" pitchFamily="34" charset="-122"/>
                 <a:cs typeface="Cambria" pitchFamily="34" charset="-120"/>
               </a:rPr>
-              <a:t>The government</a:t>
-            </a:r>
-            <a:endParaRPr lang="en-US" sz="1600" dirty="0"/>
+              <a:t>The government decides</a:t>
+            </a:r>
+            <a:endParaRPr lang="en-US" sz="1450" dirty="0"/>
           </a:p>
         </p:txBody>
       </p:sp>
@@ -7241,7 +7283,7 @@
         <p:spPr>
           <a:xfrm>
             <a:off x="6254496" y="3108960"/>
-            <a:ext cx="2121408" cy="274320"/>
+            <a:ext cx="2121408" cy="402336"/>
           </a:xfrm>
           <a:prstGeom prst="rect">
             <a:avLst/>
@@ -7260,7 +7302,7 @@
               <a:buNone/>
             </a:pPr>
             <a:r>
-              <a:rPr lang="en-US" sz="1250" dirty="0">
+              <a:rPr lang="en-US" sz="1200" dirty="0">
                 <a:solidFill>
                   <a:srgbClr val="3C444C"/>
                 </a:solidFill>
@@ -7268,9 +7310,9 @@
                 <a:ea typeface="Calibri" pitchFamily="34" charset="-122"/>
                 <a:cs typeface="Calibri" pitchFamily="34" charset="-120"/>
               </a:rPr>
-              <a:t>We already do this.</a:t>
-            </a:r>
-            <a:endParaRPr lang="en-US" sz="1250" dirty="0"/>
+              <a:t>We already do this in other places.</a:t>
+            </a:r>
+            <a:endParaRPr lang="en-US" sz="1200" dirty="0"/>
           </a:p>
         </p:txBody>
       </p:sp>
@@ -7310,7 +7352,7 @@
                 <a:ea typeface="Cambria" pitchFamily="34" charset="-122"/>
                 <a:cs typeface="Cambria" pitchFamily="34" charset="-120"/>
               </a:rPr>
-              <a:t>You will not be graded on which one you pick.</a:t>
+              <a:t>You will not be graded on which position you choose.</a:t>
             </a:r>
             <a:endParaRPr lang="en-US" sz="1800" dirty="0"/>
           </a:p>
@@ -7352,7 +7394,7 @@
                 <a:ea typeface="Calibri" pitchFamily="34" charset="-122"/>
                 <a:cs typeface="Calibri" pitchFamily="34" charset="-120"/>
               </a:rPr>
-              <a:t>You will be graded on whether you can state the strongest version of the one you did not pick.</a:t>
+              <a:t>You will be graded on how well you can state the strongest version of a position you did not choose.</a:t>
             </a:r>
             <a:endParaRPr lang="en-US" sz="1350" dirty="0"/>
           </a:p>
@@ -7504,7 +7546,7 @@
                 <a:ea typeface="Cambria" pitchFamily="34" charset="-122"/>
                 <a:cs typeface="Cambria" pitchFamily="34" charset="-120"/>
               </a:rPr>
-              <a:t>Nobody in this argument is stupid</a:t>
+              <a:t>Argue against the real version, not the weak one</a:t>
             </a:r>
             <a:endParaRPr lang="en-US" sz="3000" dirty="0"/>
           </a:p>
@@ -7546,7 +7588,7 @@
                 <a:ea typeface="Calibri" pitchFamily="34" charset="-122"/>
                 <a:cs typeface="Calibri" pitchFamily="34" charset="-120"/>
               </a:rPr>
-              <a:t>Every one of these three positions is held by serious people who have thought about it more than we have.</a:t>
+              <a:t>Every one of these three positions is held by serious people who have thought about it longer than we have.</a:t>
             </a:r>
             <a:endParaRPr lang="en-US" sz="1500" dirty="0"/>
           </a:p>
@@ -7664,7 +7706,7 @@
                 <a:ea typeface="Calibri" pitchFamily="34" charset="-122"/>
                 <a:cs typeface="Calibri" pitchFamily="34" charset="-120"/>
               </a:rPr>
-              <a:t>If a position sounds obviously wrong to you, you are probably arguing against the weak version of it.</a:t>
+              <a:t>If a position seems obviously wrong to you, you are probably arguing against a weak version of it rather than the real one.</a:t>
             </a:r>
             <a:endParaRPr lang="en-US" sz="1400" dirty="0"/>
           </a:p>
@@ -7698,7 +7740,7 @@
               <a:buNone/>
             </a:pPr>
             <a:r>
-              <a:rPr lang="en-US" sz="1350" i="1" dirty="0">
+              <a:rPr lang="en-US" sz="1350" dirty="0">
                 <a:solidFill>
                   <a:srgbClr val="3C444C"/>
                 </a:solidFill>
@@ -7706,7 +7748,7 @@
                 <a:ea typeface="Calibri" pitchFamily="34" charset="-122"/>
                 <a:cs typeface="Calibri" pitchFamily="34" charset="-120"/>
               </a:rPr>
-              <a:t>Beating the weak version of an argument teaches you nothing, and it is the easiest thing in the room to do by accident.</a:t>
+              <a:t>Beating the weak version of an argument teaches you nothing, and it is the easiest mistake in the room to make by accident.</a:t>
             </a:r>
             <a:endParaRPr lang="en-US" sz="1350" dirty="0"/>
           </a:p>
@@ -8025,7 +8067,7 @@
         <p:spPr>
           <a:xfrm>
             <a:off x="786384" y="3200400"/>
-            <a:ext cx="3364992" cy="658368"/>
+            <a:ext cx="3364992" cy="694944"/>
           </a:xfrm>
           <a:prstGeom prst="rect">
             <a:avLst/>
@@ -8052,7 +8094,7 @@
                 <a:ea typeface="Calibri" pitchFamily="34" charset="-122"/>
                 <a:cs typeface="Calibri" pitchFamily="34" charset="-120"/>
               </a:rPr>
-              <a:t>You give something up to get something. Every answer here has one.</a:t>
+              <a:t>What you give up in order to get something else. Every answer here has one.</a:t>
             </a:r>
             <a:endParaRPr lang="en-US" sz="1350" dirty="0"/>
           </a:p>
@@ -8143,7 +8185,7 @@
         <p:spPr>
           <a:xfrm>
             <a:off x="4992624" y="3200400"/>
-            <a:ext cx="3364992" cy="658368"/>
+            <a:ext cx="3364992" cy="694944"/>
           </a:xfrm>
           <a:prstGeom prst="rect">
             <a:avLst/>
@@ -8170,7 +8212,7 @@
                 <a:ea typeface="Calibri" pitchFamily="34" charset="-122"/>
                 <a:cs typeface="Calibri" pitchFamily="34" charset="-120"/>
               </a:rPr>
-              <a:t>Name your position, then name what it costs. If you cannot, you are not finished.</a:t>
+              <a:t>Name your position, then name what it costs. If you cannot name the cost, you are not finished.</a:t>
             </a:r>
             <a:endParaRPr lang="en-US" sz="1350" dirty="0"/>
           </a:p>
@@ -8454,7 +8496,7 @@
               <a:buNone/>
             </a:pPr>
             <a:r>
-              <a:rPr lang="en-US" sz="900" b="1" dirty="0">
+              <a:rPr lang="en-US" sz="850" b="1" dirty="0">
                 <a:solidFill>
                   <a:srgbClr val="1F5673"/>
                 </a:solidFill>
@@ -8462,9 +8504,9 @@
                 <a:ea typeface="Courier New" pitchFamily="34" charset="-122"/>
                 <a:cs typeface="Courier New" pitchFamily="34" charset="-120"/>
               </a:rPr>
-              <a:t>THE STRONGEST CASE</a:t>
-            </a:r>
-            <a:endParaRPr lang="en-US" sz="900" dirty="0"/>
+              <a:t>THE STRONGEST CASE: OWNERSHIP</a:t>
+            </a:r>
+            <a:endParaRPr lang="en-US" sz="850" dirty="0"/>
           </a:p>
         </p:txBody>
       </p:sp>
@@ -8532,7 +8574,7 @@
                 <a:ea typeface="Calibri" pitchFamily="34" charset="-122"/>
                 <a:cs typeface="Calibri" pitchFamily="34" charset="-120"/>
               </a:rPr>
-              <a:t>The controls exist: delete the app, turn off notifications, use the chronological feed, set a timer.</a:t>
+              <a:t>The controls already exist: delete the app, turn off notifications, switch to the chronological feed, set a timer.</a:t>
             </a:r>
             <a:endParaRPr lang="en-US" sz="1250" dirty="0"/>
           </a:p>
@@ -8556,7 +8598,7 @@
                 <a:ea typeface="Calibri" pitchFamily="34" charset="-122"/>
                 <a:cs typeface="Calibri" pitchFamily="34" charset="-120"/>
               </a:rPr>
-              <a:t>Adults get to make bad choices about their own time, and treating teenagers as incapable of choosing is its own kind of insult.</a:t>
+              <a:t>Adults are allowed to make poor choices about their own time. Treating teenagers as unable to choose is its own kind of disrespect.</a:t>
             </a:r>
             <a:endParaRPr lang="en-US" sz="1250" dirty="0"/>
           </a:p>
@@ -8624,7 +8666,7 @@
               <a:buNone/>
             </a:pPr>
             <a:r>
-              <a:rPr lang="en-US" sz="900" b="1" dirty="0">
+              <a:rPr lang="en-US" sz="850" b="1" dirty="0">
                 <a:solidFill>
                   <a:srgbClr val="8A1A1A"/>
                 </a:solidFill>
@@ -8632,9 +8674,9 @@
                 <a:ea typeface="Courier New" pitchFamily="34" charset="-122"/>
                 <a:cs typeface="Courier New" pitchFamily="34" charset="-120"/>
               </a:rPr>
-              <a:t>THE HARDEST QUESTION</a:t>
-            </a:r>
-            <a:endParaRPr lang="en-US" sz="900" dirty="0"/>
+              <a:t>THE HARDEST PROBLEM: THE SIZE OF THE MISMATCH</a:t>
+            </a:r>
+            <a:endParaRPr lang="en-US" sz="850" dirty="0"/>
           </a:p>
         </p:txBody>
       </p:sp>
@@ -8666,7 +8708,7 @@
               <a:buNone/>
             </a:pPr>
             <a:r>
-              <a:rPr lang="en-US" sz="1300" dirty="0">
+              <a:rPr lang="en-US" sz="1250" dirty="0">
                 <a:solidFill>
                   <a:srgbClr val="14171A"/>
                 </a:solidFill>
@@ -8674,9 +8716,9 @@
                 <a:ea typeface="Calibri" pitchFamily="34" charset="-122"/>
                 <a:cs typeface="Calibri" pitchFamily="34" charset="-120"/>
               </a:rPr>
-              <a:t>The app was designed by people whose job was to make it hard to put down, and they are very good at their job. Is a choice still free when one side has thousands of engineers and A/B tests and you have willpower?</a:t>
-            </a:r>
-            <a:endParaRPr lang="en-US" sz="1300" dirty="0"/>
+              <a:t>The app was designed by people whose job was to make it hard to put down, and they are very good at that job. On one side there are thousands of engineers and years of testing. On the other side there is your willpower. A choice made under those conditions is not obviously a free choice.</a:t>
+            </a:r>
+            <a:endParaRPr lang="en-US" sz="1250" dirty="0"/>
           </a:p>
         </p:txBody>
       </p:sp>
@@ -8958,7 +9000,7 @@
               <a:buNone/>
             </a:pPr>
             <a:r>
-              <a:rPr lang="en-US" sz="900" b="1" dirty="0">
+              <a:rPr lang="en-US" sz="850" b="1" dirty="0">
                 <a:solidFill>
                   <a:srgbClr val="1F5673"/>
                 </a:solidFill>
@@ -8966,9 +9008,9 @@
                 <a:ea typeface="Courier New" pitchFamily="34" charset="-122"/>
                 <a:cs typeface="Courier New" pitchFamily="34" charset="-120"/>
               </a:rPr>
-              <a:t>THE STRONGEST CASE</a:t>
-            </a:r>
-            <a:endParaRPr lang="en-US" sz="900" dirty="0"/>
+              <a:t>THE STRONGEST CASE: THEY BUILT IT</a:t>
+            </a:r>
+            <a:endParaRPr lang="en-US" sz="850" dirty="0"/>
           </a:p>
         </p:txBody>
       </p:sp>
@@ -9012,7 +9054,7 @@
                 <a:ea typeface="Calibri" pitchFamily="34" charset="-122"/>
                 <a:cs typeface="Calibri" pitchFamily="34" charset="-120"/>
               </a:rPr>
-              <a:t>They built it, they pay for it, and you are not required to use it.</a:t>
+              <a:t>The company built the product, pays for it, and does not require anyone to use it.</a:t>
             </a:r>
             <a:endParaRPr lang="en-US" sz="1250" dirty="0"/>
           </a:p>
@@ -9036,7 +9078,7 @@
                 <a:ea typeface="Calibri" pitchFamily="34" charset="-122"/>
                 <a:cs typeface="Calibri" pitchFamily="34" charset="-120"/>
               </a:rPr>
-              <a:t>Self-regulation is not nothing. Companies do change things, sometimes because users complain and sometimes because bad press costs money.</a:t>
+              <a:t>When a company sets its own rules, that is called self-regulation. It is not nothing: companies do change things when users complain or bad publicity costs money.</a:t>
             </a:r>
             <a:endParaRPr lang="en-US" sz="1250" dirty="0"/>
           </a:p>
@@ -9060,7 +9102,7 @@
                 <a:ea typeface="Calibri" pitchFamily="34" charset="-122"/>
                 <a:cs typeface="Calibri" pitchFamily="34" charset="-120"/>
               </a:rPr>
-              <a:t>They also know how the product works better than any regulator will.</a:t>
+              <a:t>They also understand the product better than any outside regulator will.</a:t>
             </a:r>
             <a:endParaRPr lang="en-US" sz="1250" dirty="0"/>
           </a:p>
@@ -9128,7 +9170,7 @@
               <a:buNone/>
             </a:pPr>
             <a:r>
-              <a:rPr lang="en-US" sz="900" b="1" dirty="0">
+              <a:rPr lang="en-US" sz="850" b="1" dirty="0">
                 <a:solidFill>
                   <a:srgbClr val="8A1A1A"/>
                 </a:solidFill>
@@ -9136,9 +9178,9 @@
                 <a:ea typeface="Courier New" pitchFamily="34" charset="-122"/>
                 <a:cs typeface="Courier New" pitchFamily="34" charset="-120"/>
               </a:rPr>
-              <a:t>THE HARDEST QUESTION</a:t>
-            </a:r>
-            <a:endParaRPr lang="en-US" sz="900" dirty="0"/>
+              <a:t>THE HARDEST PROBLEM: A CONFLICT OF INTEREST</a:t>
+            </a:r>
+            <a:endParaRPr lang="en-US" sz="850" dirty="0"/>
           </a:p>
         </p:txBody>
       </p:sp>
@@ -9170,7 +9212,7 @@
               <a:buNone/>
             </a:pPr>
             <a:r>
-              <a:rPr lang="en-US" sz="1300" dirty="0">
+              <a:rPr lang="en-US" sz="1250" dirty="0">
                 <a:solidFill>
                   <a:srgbClr val="14171A"/>
                 </a:solidFill>
@@ -9178,9 +9220,9 @@
                 <a:ea typeface="Calibri" pitchFamily="34" charset="-122"/>
                 <a:cs typeface="Calibri" pitchFamily="34" charset="-120"/>
               </a:rPr>
-              <a:t>The company's income depends on your attention. When you ask somebody to protect you from the thing that pays them, what should you expect?</a:t>
-            </a:r>
-            <a:endParaRPr lang="en-US" sz="1300" dirty="0"/>
+              <a:t>The company earns its money from your attention. Asking that company to protect you from the thing that pays it puts the company on both sides of the question at once.</a:t>
+            </a:r>
+            <a:endParaRPr lang="en-US" sz="1250" dirty="0"/>
           </a:p>
         </p:txBody>
       </p:sp>
@@ -9462,7 +9504,7 @@
               <a:buNone/>
             </a:pPr>
             <a:r>
-              <a:rPr lang="en-US" sz="900" b="1" dirty="0">
+              <a:rPr lang="en-US" sz="850" b="1" dirty="0">
                 <a:solidFill>
                   <a:srgbClr val="1F5673"/>
                 </a:solidFill>
@@ -9470,9 +9512,9 @@
                 <a:ea typeface="Courier New" pitchFamily="34" charset="-122"/>
                 <a:cs typeface="Courier New" pitchFamily="34" charset="-120"/>
               </a:rPr>
-              <a:t>THE STRONGEST CASE</a:t>
-            </a:r>
-            <a:endParaRPr lang="en-US" sz="900" dirty="0"/>
+              <a:t>THE STRONGEST CASE: WE ALREADY DO THIS</a:t>
+            </a:r>
+            <a:endParaRPr lang="en-US" sz="850" dirty="0"/>
           </a:p>
         </p:txBody>
       </p:sp>
@@ -9540,7 +9582,7 @@
                 <a:ea typeface="Calibri" pitchFamily="34" charset="-122"/>
                 <a:cs typeface="Calibri" pitchFamily="34" charset="-120"/>
               </a:rPr>
-              <a:t>We already do this: seatbelts, no cigarette ads on TV, no full-time child labor.</a:t>
+              <a:t>Cars must have seatbelts. Cigarettes cannot be advertised on television. Children cannot work full time.</a:t>
             </a:r>
             <a:endParaRPr lang="en-US" sz="1250" dirty="0"/>
           </a:p>
@@ -9564,7 +9606,7 @@
                 <a:ea typeface="Calibri" pitchFamily="34" charset="-122"/>
                 <a:cs typeface="Calibri" pitchFamily="34" charset="-120"/>
               </a:rPr>
-              <a:t>People once said each of those should be personal. Almost nobody does now.</a:t>
+              <a:t>People once argued each of those should be a personal choice. Almost nobody argues that now.</a:t>
             </a:r>
             <a:endParaRPr lang="en-US" sz="1250" dirty="0"/>
           </a:p>
@@ -9632,7 +9674,7 @@
               <a:buNone/>
             </a:pPr>
             <a:r>
-              <a:rPr lang="en-US" sz="900" b="1" dirty="0">
+              <a:rPr lang="en-US" sz="850" b="1" dirty="0">
                 <a:solidFill>
                   <a:srgbClr val="8A1A1A"/>
                 </a:solidFill>
@@ -9640,9 +9682,9 @@
                 <a:ea typeface="Courier New" pitchFamily="34" charset="-122"/>
                 <a:cs typeface="Courier New" pitchFamily="34" charset="-120"/>
               </a:rPr>
-              <a:t>THE HARDEST QUESTION</a:t>
-            </a:r>
-            <a:endParaRPr lang="en-US" sz="900" dirty="0"/>
+              <a:t>THE HARDEST PROBLEM: THE POWER CUTS BOTH WAYS</a:t>
+            </a:r>
+            <a:endParaRPr lang="en-US" sz="850" dirty="0"/>
           </a:p>
         </p:txBody>
       </p:sp>
@@ -9674,7 +9716,7 @@
               <a:buNone/>
             </a:pPr>
             <a:r>
-              <a:rPr lang="en-US" sz="1300" dirty="0">
+              <a:rPr lang="en-US" sz="1250" dirty="0">
                 <a:solidFill>
                   <a:srgbClr val="14171A"/>
                 </a:solidFill>
@@ -9682,9 +9724,9 @@
                 <a:ea typeface="Calibri" pitchFamily="34" charset="-122"/>
                 <a:cs typeface="Calibri" pitchFamily="34" charset="-120"/>
               </a:rPr>
-              <a:t>A government that can require a platform to change what it shows you can also require it to change what it shows you. The power to protect and the power to control are the same power, in different hands.</a:t>
-            </a:r>
-            <a:endParaRPr lang="en-US" sz="1300" dirty="0"/>
+              <a:t>A government that can require a platform to change what it shows you can use that same power for its own purposes later. Protecting people and controlling them require the same legal authority. What changes is who is holding it.</a:t>
+            </a:r>
+            <a:endParaRPr lang="en-US" sz="1250" dirty="0"/>
           </a:p>
         </p:txBody>
       </p:sp>
@@ -9800,7 +9842,7 @@
                 <a:ea typeface="Calibri" pitchFamily="34" charset="-122"/>
                 <a:cs typeface="Calibri" pitchFamily="34" charset="-120"/>
               </a:rPr>
-              <a:t>An unintended consequence is a result nobody wanted or predicted. Rules aimed at big platforms often land hardest on small ones that cannot afford lawyers.</a:t>
+              <a:t>An unintended consequence is a result nobody wanted or predicted. Rules written for large platforms often land hardest on small ones, which cannot afford the lawyers.</a:t>
             </a:r>
             <a:endParaRPr lang="en-US" sz="1200" dirty="0"/>
           </a:p>
@@ -10112,7 +10154,7 @@
                 <a:ea typeface="Calibri" pitchFamily="34" charset="-122"/>
                 <a:cs typeface="Calibri" pitchFamily="34" charset="-120"/>
               </a:rPr>
-              <a:t>It is your attention, and the controls exist.</a:t>
+              <a:t>It is your attention, and the controls already exist.</a:t>
             </a:r>
             <a:endParaRPr lang="en-US" sz="1200" dirty="0"/>
           </a:p>
@@ -10196,7 +10238,7 @@
                 <a:ea typeface="Calibri" pitchFamily="34" charset="-122"/>
                 <a:cs typeface="Calibri" pitchFamily="34" charset="-120"/>
               </a:rPr>
-              <a:t>The other side has thousands of engineers. You have willpower.</a:t>
+              <a:t>Thousands of engineers on one side, your willpower on the other.</a:t>
             </a:r>
             <a:endParaRPr lang="en-US" sz="1200" dirty="0"/>
           </a:p>
@@ -10356,7 +10398,7 @@
                 <a:ea typeface="Calibri" pitchFamily="34" charset="-122"/>
                 <a:cs typeface="Calibri" pitchFamily="34" charset="-120"/>
               </a:rPr>
-              <a:t>They built it, and bad press does move them.</a:t>
+              <a:t>They built it, and bad publicity does move them.</a:t>
             </a:r>
             <a:endParaRPr lang="en-US" sz="1200" dirty="0"/>
           </a:p>
@@ -10440,7 +10482,7 @@
                 <a:ea typeface="Calibri" pitchFamily="34" charset="-122"/>
                 <a:cs typeface="Calibri" pitchFamily="34" charset="-120"/>
               </a:rPr>
-              <a:t>Their income is your attention. You are asking the wrong party.</a:t>
+              <a:t>They earn money from your attention, so you are asking the wrong party.</a:t>
             </a:r>
             <a:endParaRPr lang="en-US" sz="1200" dirty="0"/>
           </a:p>
@@ -10600,7 +10642,7 @@
                 <a:ea typeface="Calibri" pitchFamily="34" charset="-122"/>
                 <a:cs typeface="Calibri" pitchFamily="34" charset="-120"/>
               </a:rPr>
-              <a:t>Seatbelts. Cigarette ads. Child labor.</a:t>
+              <a:t>Seatbelts. Cigarette advertising. Child labor.</a:t>
             </a:r>
             <a:endParaRPr lang="en-US" sz="1200" dirty="0"/>
           </a:p>
@@ -10684,7 +10726,7 @@
                 <a:ea typeface="Calibri" pitchFamily="34" charset="-122"/>
                 <a:cs typeface="Calibri" pitchFamily="34" charset="-120"/>
               </a:rPr>
-              <a:t>Protect and control are the same power, in different hands.</a:t>
+              <a:t>The same authority that protects people can be used to control them.</a:t>
             </a:r>
             <a:endParaRPr lang="en-US" sz="1200" dirty="0"/>
           </a:p>

--- a/social-media/decks/topic-06-who-gets-to-decide.pptx
+++ b/social-media/decks/topic-06-who-gets-to-decide.pptx
@@ -1219,7 +1219,7 @@
           <a:p>
             <a:r>
               <a:rPr lang="en-US" dirty="0"/>
-              <a:t>This slide decides whether the argument is any good. Say it plainly: every one of these positions is held by serious people. If a position seems obviously wrong, they are arguing with a weak version of it, and beating a weak version teaches nothing.</a:t>
+              <a:t>This slide decides whether the argument is any good. Say it plainly: every one of these positions is held by serious, thoughtful people. If a position feels obviously wrong, they are probably picturing a weak version of it, and beating a weak version teaches nothing.</a:t>
             </a:r>
             <a:endParaRPr lang="en-US" dirty="0"/>
           </a:p>
@@ -1483,7 +1483,7 @@
           <a:p>
             <a:r>
               <a:rPr lang="en-US" dirty="0"/>
-              <a:t>The self-regulation card is the one students underrate, so give it real weight: bad publicity does move companies. Then the hardest problem, which is the clearest conflict of interest in the unit. Let the silence sit for a moment.</a:t>
+              <a:t>The self-regulation card is the one students underrate, so give it real weight: bad publicity does move companies. Then the tradeoff, which is the clearest conflict of interest in the unit. Let the silence sit for a moment.</a:t>
             </a:r>
             <a:endParaRPr lang="en-US" dirty="0"/>
           </a:p>
@@ -3539,7 +3539,7 @@
                 <a:ea typeface="Calibri" pitchFamily="34" charset="-122"/>
                 <a:cs typeface="Calibri" pitchFamily="34" charset="-120"/>
               </a:rPr>
-              <a:t>ended with the industry regulating itself under the threat of government action, rather than in a law.</a:t>
+              <a:t>ended with the industry making its own rules, instead of a new law.</a:t>
             </a:r>
             <a:endParaRPr lang="en-US" sz="1300" dirty="0"/>
           </a:p>
@@ -3657,7 +3657,7 @@
                 <a:ea typeface="Calibri" pitchFamily="34" charset="-122"/>
                 <a:cs typeface="Calibri" pitchFamily="34" charset="-120"/>
               </a:rPr>
-              <a:t>The strongest claims made during several of those arguments did not hold up later. The comic book research was largely discredited. The video game research is still contested.</a:t>
+              <a:t>Some of the strongest claims made back then turned out to be wrong. The comic book research was seriously flawed. The video game research is still argued about.</a:t>
             </a:r>
             <a:endParaRPr lang="en-US" sz="1300" dirty="0"/>
           </a:p>
@@ -3699,7 +3699,7 @@
                 <a:ea typeface="Calibri" pitchFamily="34" charset="-122"/>
                 <a:cs typeface="Calibri" pitchFamily="34" charset="-120"/>
               </a:rPr>
-              <a:t>That history does not tell you the answer. It tells you that "this new thing is harming children" has been said before, sometimes correctly and sometimes not, and that the people saying it believed it either way.</a:t>
+              <a:t>This history does not tell you who is right today. People have said "this new thing is dangerous for kids" many times before, sometimes correctly and sometimes not, and they believed it either way.</a:t>
             </a:r>
             <a:endParaRPr lang="en-US" sz="1300" dirty="0"/>
           </a:p>
@@ -4441,7 +4441,7 @@
                 <a:ea typeface="Cambria" pitchFamily="34" charset="-122"/>
                 <a:cs typeface="Cambria" pitchFamily="34" charset="-120"/>
               </a:rPr>
-              <a:t>One sentence, written in 1996</a:t>
+              <a:t>One sentence, from 1996</a:t>
             </a:r>
             <a:endParaRPr lang="en-US" sz="3000" dirty="0"/>
           </a:p>
@@ -4455,12 +4455,12 @@
         </p:nvSpPr>
         <p:spPr>
           <a:xfrm>
-            <a:off x="548640" y="1517904"/>
-            <a:ext cx="8046720" cy="859536"/>
+            <a:off x="548640" y="1463040"/>
+            <a:ext cx="8046720" cy="786384"/>
           </a:xfrm>
           <a:prstGeom prst="roundRect">
             <a:avLst>
-              <a:gd name="adj" fmla="val 6383"/>
+              <a:gd name="adj" fmla="val 6977"/>
             </a:avLst>
           </a:prstGeom>
           <a:solidFill>
@@ -4489,8 +4489,8 @@
         </p:nvSpPr>
         <p:spPr>
           <a:xfrm>
-            <a:off x="822960" y="1517904"/>
-            <a:ext cx="7498080" cy="859536"/>
+            <a:off x="822960" y="1463040"/>
+            <a:ext cx="7498080" cy="786384"/>
           </a:xfrm>
           <a:prstGeom prst="rect">
             <a:avLst/>
@@ -4509,7 +4509,7 @@
               <a:buNone/>
             </a:pPr>
             <a:r>
-              <a:rPr lang="en-US" sz="1800" i="1" dirty="0">
+              <a:rPr lang="en-US" sz="1700" i="1" dirty="0">
                 <a:solidFill>
                   <a:srgbClr val="14171A"/>
                 </a:solidFill>
@@ -4517,9 +4517,9 @@
                 <a:ea typeface="Cambria" pitchFamily="34" charset="-122"/>
                 <a:cs typeface="Cambria" pitchFamily="34" charset="-120"/>
               </a:rPr>
-              <a:t>"A platform is generally not treated as the publisher of what its users post."</a:t>
-            </a:r>
-            <a:endParaRPr lang="en-US" sz="1800" dirty="0"/>
+              <a:t>In plain terms: if a user posts something illegal, the user can be held responsible. The platform usually cannot.</a:t>
+            </a:r>
+            <a:endParaRPr lang="en-US" sz="1700" dirty="0"/>
           </a:p>
         </p:txBody>
       </p:sp>
@@ -4531,8 +4531,8 @@
         </p:nvSpPr>
         <p:spPr>
           <a:xfrm>
-            <a:off x="548640" y="2487168"/>
-            <a:ext cx="658368" cy="256032"/>
+            <a:off x="548640" y="2395728"/>
+            <a:ext cx="822960" cy="365760"/>
           </a:xfrm>
           <a:prstGeom prst="rect">
             <a:avLst/>
@@ -4551,7 +4551,7 @@
               <a:buNone/>
             </a:pPr>
             <a:r>
-              <a:rPr lang="en-US" sz="1050" b="1" dirty="0">
+              <a:rPr lang="en-US" sz="950" b="1" dirty="0">
                 <a:solidFill>
                   <a:srgbClr val="8A1A1A"/>
                 </a:solidFill>
@@ -4561,7 +4561,7 @@
               </a:rPr>
               <a:t>1996</a:t>
             </a:r>
-            <a:endParaRPr lang="en-US" sz="1050" dirty="0"/>
+            <a:endParaRPr lang="en-US" sz="950" dirty="0"/>
           </a:p>
         </p:txBody>
       </p:sp>
@@ -4573,8 +4573,8 @@
         </p:nvSpPr>
         <p:spPr>
           <a:xfrm>
-            <a:off x="1298448" y="2487168"/>
-            <a:ext cx="7296912" cy="329184"/>
+            <a:off x="1463040" y="2395728"/>
+            <a:ext cx="7132320" cy="402336"/>
           </a:xfrm>
           <a:prstGeom prst="rect">
             <a:avLst/>
@@ -4588,12 +4588,12 @@
           <a:p>
             <a:pPr algn="l" indent="0" marL="0">
               <a:lnSpc>
-                <a:spcPct val="104000"/>
-              </a:lnSpc>
-              <a:buNone/>
-            </a:pPr>
-            <a:r>
-              <a:rPr lang="en-US" sz="1250" dirty="0">
+                <a:spcPct val="106000"/>
+              </a:lnSpc>
+              <a:buNone/>
+            </a:pPr>
+            <a:r>
+              <a:rPr lang="en-US" sz="1150" dirty="0">
                 <a:solidFill>
                   <a:srgbClr val="14171A"/>
                 </a:solidFill>
@@ -4601,9 +4601,9 @@
                 <a:ea typeface="Calibri" pitchFamily="34" charset="-122"/>
                 <a:cs typeface="Calibri" pitchFamily="34" charset="-120"/>
               </a:rPr>
-              <a:t>That sentence becomes part of Section 230 of the Communications Decency Act.</a:t>
-            </a:r>
-            <a:endParaRPr lang="en-US" sz="1250" dirty="0"/>
+              <a:t>One sentence becomes part of Section 230 of the Communications Decency Act: a platform is usually not treated as the publisher of what its users post.</a:t>
+            </a:r>
+            <a:endParaRPr lang="en-US" sz="1150" dirty="0"/>
           </a:p>
         </p:txBody>
       </p:sp>
@@ -4615,8 +4615,8 @@
         </p:nvSpPr>
         <p:spPr>
           <a:xfrm>
-            <a:off x="548640" y="2926080"/>
-            <a:ext cx="658368" cy="256032"/>
+            <a:off x="548640" y="2852928"/>
+            <a:ext cx="822960" cy="365760"/>
           </a:xfrm>
           <a:prstGeom prst="rect">
             <a:avLst/>
@@ -4635,7 +4635,7 @@
               <a:buNone/>
             </a:pPr>
             <a:r>
-              <a:rPr lang="en-US" sz="1050" b="1" dirty="0">
+              <a:rPr lang="en-US" sz="950" b="1" dirty="0">
                 <a:solidFill>
                   <a:srgbClr val="8A1A1A"/>
                 </a:solidFill>
@@ -4645,7 +4645,7 @@
               </a:rPr>
               <a:t>1997</a:t>
             </a:r>
-            <a:endParaRPr lang="en-US" sz="1050" dirty="0"/>
+            <a:endParaRPr lang="en-US" sz="950" dirty="0"/>
           </a:p>
         </p:txBody>
       </p:sp>
@@ -4657,8 +4657,8 @@
         </p:nvSpPr>
         <p:spPr>
           <a:xfrm>
-            <a:off x="1298448" y="2926080"/>
-            <a:ext cx="7296912" cy="329184"/>
+            <a:off x="1463040" y="2852928"/>
+            <a:ext cx="7132320" cy="402336"/>
           </a:xfrm>
           <a:prstGeom prst="rect">
             <a:avLst/>
@@ -4672,12 +4672,12 @@
           <a:p>
             <a:pPr algn="l" indent="0" marL="0">
               <a:lnSpc>
-                <a:spcPct val="104000"/>
-              </a:lnSpc>
-              <a:buNone/>
-            </a:pPr>
-            <a:r>
-              <a:rPr lang="en-US" sz="1250" dirty="0">
+                <a:spcPct val="106000"/>
+              </a:lnSpc>
+              <a:buNone/>
+            </a:pPr>
+            <a:r>
+              <a:rPr lang="en-US" sz="1150" dirty="0">
                 <a:solidFill>
                   <a:srgbClr val="14171A"/>
                 </a:solidFill>
@@ -4685,9 +4685,9 @@
                 <a:ea typeface="Calibri" pitchFamily="34" charset="-122"/>
                 <a:cs typeface="Calibri" pitchFamily="34" charset="-120"/>
               </a:rPr>
-              <a:t>The Supreme Court strikes down the rest of the law for violating free speech. Section 230 survives.</a:t>
-            </a:r>
-            <a:endParaRPr lang="en-US" sz="1250" dirty="0"/>
+              <a:t>The Supreme Court strikes down the rest of that law for violating free speech. Section 230 survives.</a:t>
+            </a:r>
+            <a:endParaRPr lang="en-US" sz="1150" dirty="0"/>
           </a:p>
         </p:txBody>
       </p:sp>
@@ -4699,8 +4699,8 @@
         </p:nvSpPr>
         <p:spPr>
           <a:xfrm>
-            <a:off x="548640" y="3364992"/>
-            <a:ext cx="658368" cy="256032"/>
+            <a:off x="548640" y="3310128"/>
+            <a:ext cx="822960" cy="365760"/>
           </a:xfrm>
           <a:prstGeom prst="rect">
             <a:avLst/>
@@ -4719,7 +4719,7 @@
               <a:buNone/>
             </a:pPr>
             <a:r>
-              <a:rPr lang="en-US" sz="1050" b="1" dirty="0">
+              <a:rPr lang="en-US" sz="950" b="1" dirty="0">
                 <a:solidFill>
                   <a:srgbClr val="8A1A1A"/>
                 </a:solidFill>
@@ -4729,7 +4729,7 @@
               </a:rPr>
               <a:t>Since</a:t>
             </a:r>
-            <a:endParaRPr lang="en-US" sz="1050" dirty="0"/>
+            <a:endParaRPr lang="en-US" sz="950" dirty="0"/>
           </a:p>
         </p:txBody>
       </p:sp>
@@ -4741,8 +4741,8 @@
         </p:nvSpPr>
         <p:spPr>
           <a:xfrm>
-            <a:off x="1298448" y="3364992"/>
-            <a:ext cx="7296912" cy="329184"/>
+            <a:off x="1463040" y="3310128"/>
+            <a:ext cx="7132320" cy="402336"/>
           </a:xfrm>
           <a:prstGeom prst="rect">
             <a:avLst/>
@@ -4756,12 +4756,12 @@
           <a:p>
             <a:pPr algn="l" indent="0" marL="0">
               <a:lnSpc>
-                <a:spcPct val="104000"/>
-              </a:lnSpc>
-              <a:buNone/>
-            </a:pPr>
-            <a:r>
-              <a:rPr lang="en-US" sz="1250" dirty="0">
+                <a:spcPct val="106000"/>
+              </a:lnSpc>
+              <a:buNone/>
+            </a:pPr>
+            <a:r>
+              <a:rPr lang="en-US" sz="1150" dirty="0">
                 <a:solidFill>
                   <a:srgbClr val="14171A"/>
                 </a:solidFill>
@@ -4769,9 +4769,9 @@
                 <a:ea typeface="Calibri" pitchFamily="34" charset="-122"/>
                 <a:cs typeface="Calibri" pitchFamily="34" charset="-120"/>
               </a:rPr>
-              <a:t>Politicians in both parties have proposed repealing it or narrowing it, for opposite reasons.</a:t>
-            </a:r>
-            <a:endParaRPr lang="en-US" sz="1250" dirty="0"/>
+              <a:t>Lawmakers from both parties have tried to change it or remove it, for different reasons.</a:t>
+            </a:r>
+            <a:endParaRPr lang="en-US" sz="1150" dirty="0"/>
           </a:p>
         </p:txBody>
       </p:sp>
@@ -4783,8 +4783,8 @@
         </p:nvSpPr>
         <p:spPr>
           <a:xfrm>
-            <a:off x="548640" y="3803904"/>
-            <a:ext cx="658368" cy="256032"/>
+            <a:off x="548640" y="3767328"/>
+            <a:ext cx="822960" cy="365760"/>
           </a:xfrm>
           <a:prstGeom prst="rect">
             <a:avLst/>
@@ -4803,7 +4803,7 @@
               <a:buNone/>
             </a:pPr>
             <a:r>
-              <a:rPr lang="en-US" sz="1050" b="1" dirty="0">
+              <a:rPr lang="en-US" sz="950" b="1" dirty="0">
                 <a:solidFill>
                   <a:srgbClr val="8A1A1A"/>
                 </a:solidFill>
@@ -4813,7 +4813,7 @@
               </a:rPr>
               <a:t>Now</a:t>
             </a:r>
-            <a:endParaRPr lang="en-US" sz="1050" dirty="0"/>
+            <a:endParaRPr lang="en-US" sz="950" dirty="0"/>
           </a:p>
         </p:txBody>
       </p:sp>
@@ -4825,8 +4825,8 @@
         </p:nvSpPr>
         <p:spPr>
           <a:xfrm>
-            <a:off x="1298448" y="3803904"/>
-            <a:ext cx="7296912" cy="329184"/>
+            <a:off x="1463040" y="3767328"/>
+            <a:ext cx="7132320" cy="402336"/>
           </a:xfrm>
           <a:prstGeom prst="rect">
             <a:avLst/>
@@ -4840,12 +4840,12 @@
           <a:p>
             <a:pPr algn="l" indent="0" marL="0">
               <a:lnSpc>
-                <a:spcPct val="104000"/>
-              </a:lnSpc>
-              <a:buNone/>
-            </a:pPr>
-            <a:r>
-              <a:rPr lang="en-US" sz="1250" dirty="0">
+                <a:spcPct val="106000"/>
+              </a:lnSpc>
+              <a:buNone/>
+            </a:pPr>
+            <a:r>
+              <a:rPr lang="en-US" sz="1150" dirty="0">
                 <a:solidFill>
                   <a:srgbClr val="14171A"/>
                 </a:solidFill>
@@ -4853,9 +4853,9 @@
                 <a:ea typeface="Calibri" pitchFamily="34" charset="-122"/>
                 <a:cs typeface="Calibri" pitchFamily="34" charset="-120"/>
               </a:rPr>
-              <a:t>It is still in place, and people are still arguing about it.</a:t>
-            </a:r>
-            <a:endParaRPr lang="en-US" sz="1250" dirty="0"/>
+              <a:t>It is still the law, and people are still fighting over it.</a:t>
+            </a:r>
+            <a:endParaRPr lang="en-US" sz="1150" dirty="0"/>
           </a:p>
         </p:txBody>
       </p:sp>
@@ -4867,7 +4867,7 @@
         </p:nvSpPr>
         <p:spPr>
           <a:xfrm>
-            <a:off x="548640" y="4279392"/>
+            <a:off x="548640" y="4297680"/>
             <a:ext cx="8046720" cy="274320"/>
           </a:xfrm>
           <a:prstGeom prst="rect">
@@ -4895,7 +4895,7 @@
                 <a:ea typeface="Calibri" pitchFamily="34" charset="-122"/>
                 <a:cs typeface="Calibri" pitchFamily="34" charset="-120"/>
               </a:rPr>
-              <a:t>The arrangement we have now was not inevitable.</a:t>
+              <a:t>The rules we have now were not the only possible outcome.</a:t>
             </a:r>
             <a:endParaRPr lang="en-US" sz="1350" dirty="0"/>
           </a:p>
@@ -5047,7 +5047,7 @@
                 <a:ea typeface="Cambria" pitchFamily="34" charset="-122"/>
                 <a:cs typeface="Cambria" pitchFamily="34" charset="-120"/>
               </a:rPr>
-              <a:t>There are three answers, and each one has a real case and a real cost. Your job today is not to win the argument.</a:t>
+              <a:t>There are three answers, and each one has a real case and a real tradeoff. Your job today is not to win the argument.</a:t>
             </a:r>
             <a:endParaRPr lang="en-US" sz="1850" dirty="0"/>
           </a:p>
@@ -8504,7 +8504,7 @@
                 <a:ea typeface="Courier New" pitchFamily="34" charset="-122"/>
                 <a:cs typeface="Courier New" pitchFamily="34" charset="-120"/>
               </a:rPr>
-              <a:t>THE STRONGEST CASE: OWNERSHIP</a:t>
+              <a:t>THE CASE</a:t>
             </a:r>
             <a:endParaRPr lang="en-US" sz="850" dirty="0"/>
           </a:p>
@@ -8550,7 +8550,7 @@
                 <a:ea typeface="Calibri" pitchFamily="34" charset="-122"/>
                 <a:cs typeface="Calibri" pitchFamily="34" charset="-120"/>
               </a:rPr>
-              <a:t>It is your attention and your phone.</a:t>
+              <a:t>It is your attention and your phone, so you should be the one who controls it.</a:t>
             </a:r>
             <a:endParaRPr lang="en-US" sz="1250" dirty="0"/>
           </a:p>
@@ -8574,7 +8574,7 @@
                 <a:ea typeface="Calibri" pitchFamily="34" charset="-122"/>
                 <a:cs typeface="Calibri" pitchFamily="34" charset="-120"/>
               </a:rPr>
-              <a:t>The controls already exist: delete the app, turn off notifications, switch to the chronological feed, set a timer.</a:t>
+              <a:t>Real tools already exist: delete the app, turn off notifications, switch to a time-ordered feed, set a timer.</a:t>
             </a:r>
             <a:endParaRPr lang="en-US" sz="1250" dirty="0"/>
           </a:p>
@@ -8598,7 +8598,7 @@
                 <a:ea typeface="Calibri" pitchFamily="34" charset="-122"/>
                 <a:cs typeface="Calibri" pitchFamily="34" charset="-120"/>
               </a:rPr>
-              <a:t>Adults are allowed to make poor choices about their own time. Treating teenagers as unable to choose is its own kind of disrespect.</a:t>
+              <a:t>Adults get to make their own choices about their time, even bad ones.</a:t>
             </a:r>
             <a:endParaRPr lang="en-US" sz="1250" dirty="0"/>
           </a:p>
@@ -8674,7 +8674,7 @@
                 <a:ea typeface="Courier New" pitchFamily="34" charset="-122"/>
                 <a:cs typeface="Courier New" pitchFamily="34" charset="-120"/>
               </a:rPr>
-              <a:t>THE HARDEST PROBLEM: THE SIZE OF THE MISMATCH</a:t>
+              <a:t>THE TRADEOFF</a:t>
             </a:r>
             <a:endParaRPr lang="en-US" sz="850" dirty="0"/>
           </a:p>
@@ -8716,7 +8716,7 @@
                 <a:ea typeface="Calibri" pitchFamily="34" charset="-122"/>
                 <a:cs typeface="Calibri" pitchFamily="34" charset="-120"/>
               </a:rPr>
-              <a:t>The app was designed by people whose job was to make it hard to put down, and they are very good at that job. On one side there are thousands of engineers and years of testing. On the other side there is your willpower. A choice made under those conditions is not obviously a free choice.</a:t>
+              <a:t>The two sides are not evenly matched. The app was built by engineers whose job is to make it hard to stop scrolling, and they have had years to get good at that job. On one side is a large, well-funded team. On the other side is your willpower, by itself.</a:t>
             </a:r>
             <a:endParaRPr lang="en-US" sz="1250" dirty="0"/>
           </a:p>
@@ -9008,7 +9008,7 @@
                 <a:ea typeface="Courier New" pitchFamily="34" charset="-122"/>
                 <a:cs typeface="Courier New" pitchFamily="34" charset="-120"/>
               </a:rPr>
-              <a:t>THE STRONGEST CASE: THEY BUILT IT</a:t>
+              <a:t>THE CASE</a:t>
             </a:r>
             <a:endParaRPr lang="en-US" sz="850" dirty="0"/>
           </a:p>
@@ -9054,7 +9054,7 @@
                 <a:ea typeface="Calibri" pitchFamily="34" charset="-122"/>
                 <a:cs typeface="Calibri" pitchFamily="34" charset="-120"/>
               </a:rPr>
-              <a:t>The company built the product, pays for it, and does not require anyone to use it.</a:t>
+              <a:t>The company built the product, pays to run it, and does not force anyone to use it.</a:t>
             </a:r>
             <a:endParaRPr lang="en-US" sz="1250" dirty="0"/>
           </a:p>
@@ -9078,7 +9078,7 @@
                 <a:ea typeface="Calibri" pitchFamily="34" charset="-122"/>
                 <a:cs typeface="Calibri" pitchFamily="34" charset="-120"/>
               </a:rPr>
-              <a:t>When a company sets its own rules, that is called self-regulation. It is not nothing: companies do change things when users complain or bad publicity costs money.</a:t>
+              <a:t>Self-regulation is a real force: companies do change their products when users complain or bad press costs them money.</a:t>
             </a:r>
             <a:endParaRPr lang="en-US" sz="1250" dirty="0"/>
           </a:p>
@@ -9102,7 +9102,7 @@
                 <a:ea typeface="Calibri" pitchFamily="34" charset="-122"/>
                 <a:cs typeface="Calibri" pitchFamily="34" charset="-120"/>
               </a:rPr>
-              <a:t>They also understand the product better than any outside regulator will.</a:t>
+              <a:t>The company also understands its own product better than an outside regulator would.</a:t>
             </a:r>
             <a:endParaRPr lang="en-US" sz="1250" dirty="0"/>
           </a:p>
@@ -9178,7 +9178,7 @@
                 <a:ea typeface="Courier New" pitchFamily="34" charset="-122"/>
                 <a:cs typeface="Courier New" pitchFamily="34" charset="-120"/>
               </a:rPr>
-              <a:t>THE HARDEST PROBLEM: A CONFLICT OF INTEREST</a:t>
+              <a:t>THE TRADEOFF</a:t>
             </a:r>
             <a:endParaRPr lang="en-US" sz="850" dirty="0"/>
           </a:p>
@@ -9220,7 +9220,7 @@
                 <a:ea typeface="Calibri" pitchFamily="34" charset="-122"/>
                 <a:cs typeface="Calibri" pitchFamily="34" charset="-120"/>
               </a:rPr>
-              <a:t>The company earns its money from your attention. Asking that company to protect you from the thing that pays it puts the company on both sides of the question at once.</a:t>
+              <a:t>The company earns its money from your attention. Fixing the problem would mean reducing the exact thing that makes the company money. That is a hard thing to ask a company to do to itself.</a:t>
             </a:r>
             <a:endParaRPr lang="en-US" sz="1250" dirty="0"/>
           </a:p>
@@ -9512,7 +9512,7 @@
                 <a:ea typeface="Courier New" pitchFamily="34" charset="-122"/>
                 <a:cs typeface="Courier New" pitchFamily="34" charset="-120"/>
               </a:rPr>
-              <a:t>THE STRONGEST CASE: WE ALREADY DO THIS</a:t>
+              <a:t>THE CASE</a:t>
             </a:r>
             <a:endParaRPr lang="en-US" sz="850" dirty="0"/>
           </a:p>
@@ -9558,7 +9558,7 @@
                 <a:ea typeface="Calibri" pitchFamily="34" charset="-122"/>
                 <a:cs typeface="Calibri" pitchFamily="34" charset="-120"/>
               </a:rPr>
-              <a:t>Regulation means the government sets rules a company has to follow.</a:t>
+              <a:t>Regulation means the government requires a company to follow certain rules.</a:t>
             </a:r>
             <a:endParaRPr lang="en-US" sz="1250" dirty="0"/>
           </a:p>
@@ -9582,7 +9582,7 @@
                 <a:ea typeface="Calibri" pitchFamily="34" charset="-122"/>
                 <a:cs typeface="Calibri" pitchFamily="34" charset="-120"/>
               </a:rPr>
-              <a:t>Cars must have seatbelts. Cigarettes cannot be advertised on television. Children cannot work full time.</a:t>
+              <a:t>We already do this constantly: seatbelts, no cigarette ads on TV, no full-time child labor.</a:t>
             </a:r>
             <a:endParaRPr lang="en-US" sz="1250" dirty="0"/>
           </a:p>
@@ -9606,7 +9606,7 @@
                 <a:ea typeface="Calibri" pitchFamily="34" charset="-122"/>
                 <a:cs typeface="Calibri" pitchFamily="34" charset="-120"/>
               </a:rPr>
-              <a:t>People once argued each of those should be a personal choice. Almost nobody argues that now.</a:t>
+              <a:t>People used to say those choices should be personal. Almost nobody says that now.</a:t>
             </a:r>
             <a:endParaRPr lang="en-US" sz="1250" dirty="0"/>
           </a:p>
@@ -9682,7 +9682,7 @@
                 <a:ea typeface="Courier New" pitchFamily="34" charset="-122"/>
                 <a:cs typeface="Courier New" pitchFamily="34" charset="-120"/>
               </a:rPr>
-              <a:t>THE HARDEST PROBLEM: THE POWER CUTS BOTH WAYS</a:t>
+              <a:t>THE TRADEOFF</a:t>
             </a:r>
             <a:endParaRPr lang="en-US" sz="850" dirty="0"/>
           </a:p>
@@ -9724,7 +9724,7 @@
                 <a:ea typeface="Calibri" pitchFamily="34" charset="-122"/>
                 <a:cs typeface="Calibri" pitchFamily="34" charset="-120"/>
               </a:rPr>
-              <a:t>A government that can require a platform to change what it shows you can use that same power for its own purposes later. Protecting people and controlling them require the same legal authority. What changes is who is holding it.</a:t>
+              <a:t>The same power can be used two different ways. A government allowed to make a platform protect people is also a government allowed to make a platform control what people see. Right now we would be trusting it to use that power only the first way.</a:t>
             </a:r>
             <a:endParaRPr lang="en-US" sz="1250" dirty="0"/>
           </a:p>
@@ -9842,7 +9842,7 @@
                 <a:ea typeface="Calibri" pitchFamily="34" charset="-122"/>
                 <a:cs typeface="Calibri" pitchFamily="34" charset="-120"/>
               </a:rPr>
-              <a:t>An unintended consequence is a result nobody wanted or predicted. Rules written for large platforms often land hardest on small ones, which cannot afford the lawyers.</a:t>
+              <a:t>Rules written for large platforms often hurt small ones the most, because small companies cannot afford the lawyers new rules require.</a:t>
             </a:r>
             <a:endParaRPr lang="en-US" sz="1200" dirty="0"/>
           </a:p>
@@ -9994,7 +9994,7 @@
                 <a:ea typeface="Cambria" pitchFamily="34" charset="-122"/>
                 <a:cs typeface="Cambria" pitchFamily="34" charset="-120"/>
               </a:rPr>
-              <a:t>The case, and the cost</a:t>
+              <a:t>The case, and the tradeoff</a:t>
             </a:r>
             <a:endParaRPr lang="en-US" sz="3000" dirty="0"/>
           </a:p>
@@ -10196,7 +10196,7 @@
                 <a:ea typeface="Courier New" pitchFamily="34" charset="-122"/>
                 <a:cs typeface="Courier New" pitchFamily="34" charset="-120"/>
               </a:rPr>
-              <a:t>THE COST</a:t>
+              <a:t>THE TRADEOFF</a:t>
             </a:r>
             <a:endParaRPr lang="en-US" sz="850" dirty="0"/>
           </a:p>
@@ -10238,7 +10238,7 @@
                 <a:ea typeface="Calibri" pitchFamily="34" charset="-122"/>
                 <a:cs typeface="Calibri" pitchFamily="34" charset="-120"/>
               </a:rPr>
-              <a:t>Thousands of engineers on one side, your willpower on the other.</a:t>
+              <a:t>A large, well-funded team on one side, your willpower on the other.</a:t>
             </a:r>
             <a:endParaRPr lang="en-US" sz="1200" dirty="0"/>
           </a:p>
@@ -10398,7 +10398,7 @@
                 <a:ea typeface="Calibri" pitchFamily="34" charset="-122"/>
                 <a:cs typeface="Calibri" pitchFamily="34" charset="-120"/>
               </a:rPr>
-              <a:t>They built it, and bad publicity does move them.</a:t>
+              <a:t>They built it, and bad press does move them.</a:t>
             </a:r>
             <a:endParaRPr lang="en-US" sz="1200" dirty="0"/>
           </a:p>
@@ -10440,7 +10440,7 @@
                 <a:ea typeface="Courier New" pitchFamily="34" charset="-122"/>
                 <a:cs typeface="Courier New" pitchFamily="34" charset="-120"/>
               </a:rPr>
-              <a:t>THE COST</a:t>
+              <a:t>THE TRADEOFF</a:t>
             </a:r>
             <a:endParaRPr lang="en-US" sz="850" dirty="0"/>
           </a:p>
@@ -10482,7 +10482,7 @@
                 <a:ea typeface="Calibri" pitchFamily="34" charset="-122"/>
                 <a:cs typeface="Calibri" pitchFamily="34" charset="-120"/>
               </a:rPr>
-              <a:t>They earn money from your attention, so you are asking the wrong party.</a:t>
+              <a:t>Fixing the problem means giving up the thing that makes them money.</a:t>
             </a:r>
             <a:endParaRPr lang="en-US" sz="1200" dirty="0"/>
           </a:p>
@@ -10684,7 +10684,7 @@
                 <a:ea typeface="Courier New" pitchFamily="34" charset="-122"/>
                 <a:cs typeface="Courier New" pitchFamily="34" charset="-120"/>
               </a:rPr>
-              <a:t>THE COST</a:t>
+              <a:t>THE TRADEOFF</a:t>
             </a:r>
             <a:endParaRPr lang="en-US" sz="850" dirty="0"/>
           </a:p>
@@ -10726,7 +10726,7 @@
                 <a:ea typeface="Calibri" pitchFamily="34" charset="-122"/>
                 <a:cs typeface="Calibri" pitchFamily="34" charset="-120"/>
               </a:rPr>
-              <a:t>The same authority that protects people can be used to control them.</a:t>
+              <a:t>The same power that protects people can be used to control them.</a:t>
             </a:r>
             <a:endParaRPr lang="en-US" sz="1200" dirty="0"/>
           </a:p>
@@ -10768,7 +10768,7 @@
                 <a:ea typeface="Calibri" pitchFamily="34" charset="-122"/>
                 <a:cs typeface="Calibri" pitchFamily="34" charset="-120"/>
               </a:rPr>
-              <a:t>If you cannot say the cost of your own position, you are not ready to write about it yet.</a:t>
+              <a:t>If you cannot name your own tradeoff, you are not ready to write about it yet.</a:t>
             </a:r>
             <a:endParaRPr lang="en-US" sz="1350" dirty="0"/>
           </a:p>
